--- a/docs/05-segundo-entregable/Presentacion-Segundo-Entregable-MarketGT.pptx
+++ b/docs/05-segundo-entregable/Presentacion-Segundo-Entregable-MarketGT.pptx
@@ -4,6 +4,9 @@
   <p:sldMasterIdLst>
     <p:sldMasterId id="2147483648" r:id="rId1"/>
   </p:sldMasterIdLst>
+  <p:notesMasterIdLst>
+    <p:notesMasterId r:id="rId9"/>
+  </p:notesMasterIdLst>
   <p:sldIdLst>
     <p:sldId id="256" r:id="rId2"/>
     <p:sldId id="257" r:id="rId3"/>
@@ -13,10 +16,7 @@
     <p:sldId id="261" r:id="rId7"/>
     <p:sldId id="262" r:id="rId8"/>
   </p:sldIdLst>
-  <p:notesMasterIdLst>
-    <p:notesMasterId r:id="rId9"/>
-  </p:notesMasterIdLst>
-  <p:sldSz cx="9144000" cy="5143500"/>
+  <p:sldSz cx="9144000" cy="5143500" type="screen16x9"/>
   <p:notesSz cx="5143500" cy="9144000"/>
   <p:defaultTextStyle>
     <a:lvl1pPr marL="0" algn="l" defTabSz="914400" rtl="0" eaLnBrk="1" latinLnBrk="0" hangingPunct="1">
@@ -110,6 +110,11 @@
       </a:defRPr>
     </a:lvl9pPr>
   </p:defaultTextStyle>
+  <p:extLst>
+    <p:ext uri="{EFAFB233-063F-42B5-8137-9DF3F51BA10A}">
+      <p15:sldGuideLst xmlns:p15="http://schemas.microsoft.com/office/powerpoint/2012/main"/>
+    </p:ext>
+  </p:extLst>
 </p:presentation>
 </file>
 
@@ -135,234 +140,10 @@
           <a:chExt cx="0" cy="0"/>
         </a:xfrm>
       </p:grpSpPr>
-      <p:sp>
-        <p:nvSpPr>
-          <p:cNvPr id="2" name="Header Placeholder 1"/>
-          <p:cNvSpPr>
-            <a:spLocks noGrp="1"/>
-          </p:cNvSpPr>
-          <p:nvPr>
-            <p:ph type="hdr" sz="quarter"/>
-          </p:nvPr>
-        </p:nvSpPr>
-        <p:spPr>
-          <a:xfrm>
-            <a:off x="0" y="0"/>
-            <a:ext cx="2971800" cy="458788"/>
-          </a:xfrm>
-          <a:prstGeom prst="rect">
-            <a:avLst/>
-          </a:prstGeom>
-        </p:spPr>
-        <p:txBody>
-          <a:bodyPr vert="horz" lIns="91440" tIns="45720" rIns="91440" bIns="45720" rtlCol="0"/>
-          <a:lstStyle>
-            <a:lvl1pPr algn="l">
-              <a:defRPr sz="1200"/>
-            </a:lvl1pPr>
-          </a:lstStyle>
-          <a:p>
-            <a:endParaRPr lang="en-US"/>
-          </a:p>
-        </p:txBody>
-      </p:sp>
-      <p:sp>
-        <p:nvSpPr>
-          <p:cNvPr id="3" name="Date Placeholder 2"/>
-          <p:cNvSpPr>
-            <a:spLocks noGrp="1"/>
-          </p:cNvSpPr>
-          <p:nvPr>
-            <p:ph type="dt" idx="1"/>
-          </p:nvPr>
-        </p:nvSpPr>
-        <p:spPr>
-          <a:xfrm>
-            <a:off x="3884613" y="0"/>
-            <a:ext cx="2971800" cy="458788"/>
-          </a:xfrm>
-          <a:prstGeom prst="rect">
-            <a:avLst/>
-          </a:prstGeom>
-        </p:spPr>
-        <p:txBody>
-          <a:bodyPr vert="horz" lIns="91440" tIns="45720" rIns="91440" bIns="45720" rtlCol="0"/>
-          <a:lstStyle>
-            <a:lvl1pPr algn="r">
-              <a:defRPr sz="1200"/>
-            </a:lvl1pPr>
-          </a:lstStyle>
-          <a:p>
-            <a:fld id="{5282F153-3F37-0F45-9E97-73ACFA13230C}" type="datetimeFigureOut">
-              <a:rPr lang="en-US"/>
-              <a:t>7/23/19</a:t>
-            </a:fld>
-            <a:endParaRPr lang="en-US"/>
-          </a:p>
-        </p:txBody>
-      </p:sp>
-      <p:sp>
-        <p:nvSpPr>
-          <p:cNvPr id="4" name="Slide Image Placeholder 3"/>
-          <p:cNvSpPr>
-            <a:spLocks noGrp="1" noRot="1" noChangeAspect="1"/>
-          </p:cNvSpPr>
-          <p:nvPr>
-            <p:ph type="sldImg" idx="2"/>
-          </p:nvPr>
-        </p:nvSpPr>
-        <p:spPr>
-          <a:xfrm>
-            <a:off x="685800" y="1143000"/>
-            <a:ext cx="5486400" cy="3086100"/>
-          </a:xfrm>
-          <a:prstGeom prst="rect">
-            <a:avLst/>
-          </a:prstGeom>
-          <a:noFill/>
-          <a:ln w="12700">
-            <a:solidFill>
-              <a:prstClr val="black"/>
-            </a:solidFill>
-          </a:ln>
-        </p:spPr>
-        <p:txBody>
-          <a:bodyPr vert="horz" lIns="91440" tIns="45720" rIns="91440" bIns="45720" rtlCol="0" anchor="ctr"/>
-          <a:lstStyle/>
-          <a:p>
-            <a:endParaRPr lang="en-US"/>
-          </a:p>
-        </p:txBody>
-      </p:sp>
-      <p:sp>
-        <p:nvSpPr>
-          <p:cNvPr id="5" name="Notes Placeholder 4"/>
-          <p:cNvSpPr>
-            <a:spLocks noGrp="1"/>
-          </p:cNvSpPr>
-          <p:nvPr>
-            <p:ph type="body" sz="quarter" idx="3"/>
-          </p:nvPr>
-        </p:nvSpPr>
-        <p:spPr>
-          <a:xfrm>
-            <a:off x="685800" y="4400550"/>
-            <a:ext cx="5486400" cy="3600450"/>
-          </a:xfrm>
-          <a:prstGeom prst="rect">
-            <a:avLst/>
-          </a:prstGeom>
-        </p:spPr>
-        <p:txBody>
-          <a:bodyPr vert="horz" lIns="91440" tIns="45720" rIns="91440" bIns="45720" rtlCol="0"/>
-          <a:lstStyle/>
-          <a:p>
-            <a:pPr lvl="0"/>
-            <a:r>
-              <a:rPr lang="en-US"/>
-              <a:t>Click to edit Master text styles</a:t>
-            </a:r>
-          </a:p>
-          <a:p>
-            <a:pPr lvl="1"/>
-            <a:r>
-              <a:rPr lang="en-US"/>
-              <a:t>Second level</a:t>
-            </a:r>
-          </a:p>
-          <a:p>
-            <a:pPr lvl="2"/>
-            <a:r>
-              <a:rPr lang="en-US"/>
-              <a:t>Third level</a:t>
-            </a:r>
-          </a:p>
-          <a:p>
-            <a:pPr lvl="3"/>
-            <a:r>
-              <a:rPr lang="en-US"/>
-              <a:t>Fourth level</a:t>
-            </a:r>
-          </a:p>
-          <a:p>
-            <a:pPr lvl="4"/>
-            <a:r>
-              <a:rPr lang="en-US"/>
-              <a:t>Fifth level</a:t>
-            </a:r>
-          </a:p>
-        </p:txBody>
-      </p:sp>
-      <p:sp>
-        <p:nvSpPr>
-          <p:cNvPr id="6" name="Footer Placeholder 5"/>
-          <p:cNvSpPr>
-            <a:spLocks noGrp="1"/>
-          </p:cNvSpPr>
-          <p:nvPr>
-            <p:ph type="ftr" sz="quarter" idx="4"/>
-          </p:nvPr>
-        </p:nvSpPr>
-        <p:spPr>
-          <a:xfrm>
-            <a:off x="0" y="8685213"/>
-            <a:ext cx="2971800" cy="458787"/>
-          </a:xfrm>
-          <a:prstGeom prst="rect">
-            <a:avLst/>
-          </a:prstGeom>
-        </p:spPr>
-        <p:txBody>
-          <a:bodyPr vert="horz" lIns="91440" tIns="45720" rIns="91440" bIns="45720" rtlCol="0" anchor="b"/>
-          <a:lstStyle>
-            <a:lvl1pPr algn="l">
-              <a:defRPr sz="1200"/>
-            </a:lvl1pPr>
-          </a:lstStyle>
-          <a:p>
-            <a:endParaRPr lang="en-US"/>
-          </a:p>
-        </p:txBody>
-      </p:sp>
-      <p:sp>
-        <p:nvSpPr>
-          <p:cNvPr id="7" name="Slide Number Placeholder 6"/>
-          <p:cNvSpPr>
-            <a:spLocks noGrp="1"/>
-          </p:cNvSpPr>
-          <p:nvPr>
-            <p:ph type="sldNum" sz="quarter" idx="5"/>
-          </p:nvPr>
-        </p:nvSpPr>
-        <p:spPr>
-          <a:xfrm>
-            <a:off x="3884613" y="8685213"/>
-            <a:ext cx="2971800" cy="458787"/>
-          </a:xfrm>
-          <a:prstGeom prst="rect">
-            <a:avLst/>
-          </a:prstGeom>
-        </p:spPr>
-        <p:txBody>
-          <a:bodyPr vert="horz" lIns="91440" tIns="45720" rIns="91440" bIns="45720" rtlCol="0" anchor="b"/>
-          <a:lstStyle>
-            <a:lvl1pPr algn="r">
-              <a:defRPr sz="1200"/>
-            </a:lvl1pPr>
-          </a:lstStyle>
-          <a:p>
-            <a:fld id="{CE5E9CC1-C706-0F49-92D6-E571CC5EEA8F}" type="slidenum">
-              <a:rPr lang="en-US"/>
-              <a:t>‹#›</a:t>
-            </a:fld>
-            <a:endParaRPr lang="en-US"/>
-          </a:p>
-        </p:txBody>
-      </p:sp>
     </p:spTree>
     <p:extLst>
       <p:ext uri="{BB962C8B-B14F-4D97-AF65-F5344CB8AC3E}">
-        <p14:creationId xmlns:p14="http://schemas.microsoft.com/office/powerpoint/2010/main" val="1024086991"/>
+        <p14:creationId xmlns:p14="http://schemas.microsoft.com/office/powerpoint/2010/main" val="547234350"/>
       </p:ext>
     </p:extLst>
   </p:cSld>
@@ -506,10 +287,6 @@
           <a:bodyPr/>
           <a:lstStyle/>
           <a:p>
-            <a:r>
-              <a:rPr lang="en-US" dirty="0"/>
-              <a:t/>
-            </a:r>
             <a:endParaRPr lang="en-US" dirty="0"/>
           </a:p>
         </p:txBody>
@@ -594,10 +371,6 @@
           <a:bodyPr/>
           <a:lstStyle/>
           <a:p>
-            <a:r>
-              <a:rPr lang="en-US" dirty="0"/>
-              <a:t/>
-            </a:r>
             <a:endParaRPr lang="en-US" dirty="0"/>
           </a:p>
         </p:txBody>
@@ -682,10 +455,6 @@
           <a:bodyPr/>
           <a:lstStyle/>
           <a:p>
-            <a:r>
-              <a:rPr lang="en-US" dirty="0"/>
-              <a:t/>
-            </a:r>
             <a:endParaRPr lang="en-US" dirty="0"/>
           </a:p>
         </p:txBody>
@@ -770,10 +539,6 @@
           <a:bodyPr/>
           <a:lstStyle/>
           <a:p>
-            <a:r>
-              <a:rPr lang="en-US" dirty="0"/>
-              <a:t/>
-            </a:r>
             <a:endParaRPr lang="en-US" dirty="0"/>
           </a:p>
         </p:txBody>
@@ -858,10 +623,6 @@
           <a:bodyPr/>
           <a:lstStyle/>
           <a:p>
-            <a:r>
-              <a:rPr lang="en-US" dirty="0"/>
-              <a:t/>
-            </a:r>
             <a:endParaRPr lang="en-US" dirty="0"/>
           </a:p>
         </p:txBody>
@@ -946,10 +707,6 @@
           <a:bodyPr/>
           <a:lstStyle/>
           <a:p>
-            <a:r>
-              <a:rPr lang="en-US" dirty="0"/>
-              <a:t/>
-            </a:r>
             <a:endParaRPr lang="en-US" dirty="0"/>
           </a:p>
         </p:txBody>
@@ -1034,10 +791,6 @@
           <a:bodyPr/>
           <a:lstStyle/>
           <a:p>
-            <a:r>
-              <a:rPr lang="en-US" dirty="0"/>
-              <a:t/>
-            </a:r>
             <a:endParaRPr lang="en-US" dirty="0"/>
           </a:p>
         </p:txBody>
@@ -1111,6 +864,11 @@
 <file path=ppt/slideMasters/slideMaster1.xml><?xml version="1.0" encoding="utf-8"?>
 <p:sldMaster xmlns:a="http://schemas.openxmlformats.org/drawingml/2006/main" xmlns:r="http://schemas.openxmlformats.org/officeDocument/2006/relationships" xmlns:p="http://schemas.openxmlformats.org/presentationml/2006/main">
   <p:cSld>
+    <p:bg>
+      <p:bgRef idx="1001">
+        <a:schemeClr val="bg1"/>
+      </p:bgRef>
+    </p:bg>
     <p:spTree>
       <p:nvGrpSpPr>
         <p:cNvPr id="1" name=""/>
@@ -1393,6 +1151,7 @@
         <a:solidFill>
           <a:srgbClr val="0F2942"/>
         </a:solidFill>
+        <a:effectLst/>
       </p:bgPr>
     </p:bg>
     <p:spTree>
@@ -1428,6 +1187,13 @@
           </a:solidFill>
           <a:ln/>
         </p:spPr>
+        <p:txBody>
+          <a:bodyPr/>
+          <a:lstStyle/>
+          <a:p>
+            <a:endParaRPr lang="es-GT"/>
+          </a:p>
+        </p:txBody>
       </p:sp>
       <p:sp>
         <p:nvSpPr>
@@ -1450,7 +1216,7 @@
           <a:bodyPr wrap="square" rtlCol="0" anchor="ctr"/>
           <a:lstStyle/>
           <a:p>
-            <a:pPr indent="0" marL="0">
+            <a:pPr marL="0" indent="0">
               <a:buNone/>
             </a:pPr>
             <a:r>
@@ -1489,7 +1255,7 @@
           <a:bodyPr wrap="square" rtlCol="0" anchor="ctr"/>
           <a:lstStyle/>
           <a:p>
-            <a:pPr indent="0" marL="0">
+            <a:pPr marL="0" indent="0">
               <a:buNone/>
             </a:pPr>
             <a:r>
@@ -1528,7 +1294,7 @@
           <a:bodyPr wrap="square" rtlCol="0" anchor="ctr"/>
           <a:lstStyle/>
           <a:p>
-            <a:pPr indent="0" marL="0">
+            <a:pPr marL="0" indent="0">
               <a:buNone/>
             </a:pPr>
             <a:r>
@@ -1567,7 +1333,7 @@
           <a:bodyPr wrap="square" rtlCol="0" anchor="ctr"/>
           <a:lstStyle/>
           <a:p>
-            <a:pPr indent="0" marL="0">
+            <a:pPr marL="0" indent="0">
               <a:buNone/>
             </a:pPr>
             <a:r>
@@ -1604,6 +1370,13 @@
           </a:solidFill>
           <a:ln/>
         </p:spPr>
+        <p:txBody>
+          <a:bodyPr/>
+          <a:lstStyle/>
+          <a:p>
+            <a:endParaRPr lang="es-GT"/>
+          </a:p>
+        </p:txBody>
       </p:sp>
       <p:sp>
         <p:nvSpPr>
@@ -1626,7 +1399,7 @@
           <a:bodyPr wrap="square" rtlCol="0" anchor="ctr"/>
           <a:lstStyle/>
           <a:p>
-            <a:pPr indent="0" marL="0">
+            <a:pPr marL="0" indent="0">
               <a:buNone/>
             </a:pPr>
             <a:r>
@@ -1665,7 +1438,7 @@
           <a:bodyPr wrap="square" rtlCol="0" anchor="ctr"/>
           <a:lstStyle/>
           <a:p>
-            <a:pPr indent="0" marL="0">
+            <a:pPr marL="0" indent="0">
               <a:buNone/>
             </a:pPr>
             <a:r>
@@ -1679,9 +1452,6 @@
               </a:rPr>
               <a:t>Diego Antonio Beteta Garcia</a:t>
             </a:r>
-            <a:pPr indent="0" marL="0">
-              <a:buNone/>
-            </a:pPr>
             <a:r>
               <a:rPr lang="en-US" sz="1200" dirty="0">
                 <a:solidFill>
@@ -1718,7 +1488,7 @@
           <a:bodyPr wrap="square" rtlCol="0" anchor="ctr"/>
           <a:lstStyle/>
           <a:p>
-            <a:pPr indent="0" marL="0">
+            <a:pPr marL="0" indent="0">
               <a:buNone/>
             </a:pPr>
             <a:r>
@@ -1732,9 +1502,6 @@
               </a:rPr>
               <a:t>Jonathan Rogelio Herrera Soto</a:t>
             </a:r>
-            <a:pPr indent="0" marL="0">
-              <a:buNone/>
-            </a:pPr>
             <a:r>
               <a:rPr lang="en-US" sz="1200" dirty="0">
                 <a:solidFill>
@@ -1771,7 +1538,7 @@
           <a:bodyPr wrap="square" rtlCol="0" anchor="ctr"/>
           <a:lstStyle/>
           <a:p>
-            <a:pPr indent="0" marL="0">
+            <a:pPr marL="0" indent="0">
               <a:buNone/>
             </a:pPr>
             <a:r>
@@ -1785,9 +1552,6 @@
               </a:rPr>
               <a:t>Mario Roberto Rompich Yoc</a:t>
             </a:r>
-            <a:pPr indent="0" marL="0">
-              <a:buNone/>
-            </a:pPr>
             <a:r>
               <a:rPr lang="en-US" sz="1200" dirty="0">
                 <a:solidFill>
@@ -1822,6 +1586,13 @@
           </a:solidFill>
           <a:ln/>
         </p:spPr>
+        <p:txBody>
+          <a:bodyPr/>
+          <a:lstStyle/>
+          <a:p>
+            <a:endParaRPr lang="es-GT"/>
+          </a:p>
+        </p:txBody>
       </p:sp>
       <p:sp>
         <p:nvSpPr>
@@ -1844,7 +1615,7 @@
           <a:bodyPr wrap="square" rtlCol="0" anchor="ctr"/>
           <a:lstStyle/>
           <a:p>
-            <a:pPr indent="0" marL="0">
+            <a:pPr marL="0" indent="0">
               <a:buNone/>
             </a:pPr>
             <a:r>
@@ -1859,9 +1630,6 @@
               <a:t>Entorno publicado
 </a:t>
             </a:r>
-            <a:pPr indent="0" marL="0">
-              <a:buNone/>
-            </a:pPr>
             <a:r>
               <a:rPr lang="en-US" sz="1400" b="1" dirty="0">
                 <a:solidFill>
@@ -1898,7 +1666,7 @@
           <a:bodyPr wrap="square" rtlCol="0" anchor="ctr"/>
           <a:lstStyle/>
           <a:p>
-            <a:pPr indent="0" marL="0">
+            <a:pPr marL="0" indent="0">
               <a:buNone/>
             </a:pPr>
             <a:r>
@@ -1960,6 +1728,13 @@
           </a:solidFill>
           <a:ln/>
         </p:spPr>
+        <p:txBody>
+          <a:bodyPr/>
+          <a:lstStyle/>
+          <a:p>
+            <a:endParaRPr lang="es-GT"/>
+          </a:p>
+        </p:txBody>
       </p:sp>
       <p:sp>
         <p:nvSpPr>
@@ -1980,6 +1755,13 @@
           </a:solidFill>
           <a:ln/>
         </p:spPr>
+        <p:txBody>
+          <a:bodyPr/>
+          <a:lstStyle/>
+          <a:p>
+            <a:endParaRPr lang="es-GT"/>
+          </a:p>
+        </p:txBody>
       </p:sp>
       <p:sp>
         <p:nvSpPr>
@@ -2002,7 +1784,7 @@
           <a:bodyPr wrap="square" rtlCol="0" anchor="ctr"/>
           <a:lstStyle/>
           <a:p>
-            <a:pPr algn="ctr" indent="0" marL="0">
+            <a:pPr marL="0" indent="0" algn="ctr">
               <a:buNone/>
             </a:pPr>
             <a:r>
@@ -2041,7 +1823,7 @@
           <a:bodyPr wrap="square" rtlCol="0" anchor="ctr"/>
           <a:lstStyle/>
           <a:p>
-            <a:pPr indent="0" marL="0">
+            <a:pPr marL="0" indent="0">
               <a:buNone/>
             </a:pPr>
             <a:r>
@@ -2080,7 +1862,7 @@
           <a:bodyPr wrap="square" rtlCol="0" anchor="ctr"/>
           <a:lstStyle/>
           <a:p>
-            <a:pPr indent="0" marL="0">
+            <a:pPr marL="0" indent="0">
               <a:buNone/>
             </a:pPr>
             <a:r>
@@ -2117,6 +1899,13 @@
           </a:solidFill>
           <a:ln/>
         </p:spPr>
+        <p:txBody>
+          <a:bodyPr/>
+          <a:lstStyle/>
+          <a:p>
+            <a:endParaRPr lang="es-GT"/>
+          </a:p>
+        </p:txBody>
       </p:sp>
       <p:sp>
         <p:nvSpPr>
@@ -2139,11 +1928,11 @@
           <a:bodyPr wrap="square" rtlCol="0" anchor="ctr"/>
           <a:lstStyle/>
           <a:p>
-            <a:pPr indent="0" marL="0">
+            <a:pPr marL="0" indent="0">
               <a:buNone/>
             </a:pPr>
             <a:r>
-              <a:rPr lang="en-US" sz="1100" b="1" spc="60" kern="0" dirty="0">
+              <a:rPr lang="en-US" sz="1100" b="1" kern="0" spc="60" dirty="0">
                 <a:solidFill>
                   <a:srgbClr val="FFFFFF"/>
                 </a:solidFill>
@@ -2181,6 +1970,13 @@
             <a:prstDash val="solid"/>
           </a:ln>
         </p:spPr>
+        <p:txBody>
+          <a:bodyPr/>
+          <a:lstStyle/>
+          <a:p>
+            <a:endParaRPr lang="es-GT"/>
+          </a:p>
+        </p:txBody>
       </p:sp>
       <p:sp>
         <p:nvSpPr>
@@ -2370,6 +2166,13 @@
           </a:solidFill>
           <a:ln/>
         </p:spPr>
+        <p:txBody>
+          <a:bodyPr/>
+          <a:lstStyle/>
+          <a:p>
+            <a:endParaRPr lang="es-GT"/>
+          </a:p>
+        </p:txBody>
       </p:sp>
       <p:sp>
         <p:nvSpPr>
@@ -2392,11 +2195,11 @@
           <a:bodyPr wrap="square" rtlCol="0" anchor="ctr"/>
           <a:lstStyle/>
           <a:p>
-            <a:pPr indent="0" marL="0">
+            <a:pPr marL="0" indent="0">
               <a:buNone/>
             </a:pPr>
             <a:r>
-              <a:rPr lang="en-US" sz="1100" b="1" spc="60" kern="0" dirty="0">
+              <a:rPr lang="en-US" sz="1100" b="1" kern="0" spc="60" dirty="0">
                 <a:solidFill>
                   <a:srgbClr val="FFFFFF"/>
                 </a:solidFill>
@@ -2434,6 +2237,13 @@
             <a:prstDash val="solid"/>
           </a:ln>
         </p:spPr>
+        <p:txBody>
+          <a:bodyPr/>
+          <a:lstStyle/>
+          <a:p>
+            <a:endParaRPr lang="es-GT"/>
+          </a:p>
+        </p:txBody>
       </p:sp>
       <p:sp>
         <p:nvSpPr>
@@ -2456,7 +2266,7 @@
           <a:bodyPr wrap="square" rtlCol="0" anchor="t"/>
           <a:lstStyle/>
           <a:p>
-            <a:pPr indent="0" marL="0">
+            <a:pPr marL="0" indent="0">
               <a:lnSpc>
                 <a:spcPct val="105000"/>
               </a:lnSpc>
@@ -2473,12 +2283,6 @@
               </a:rPr>
               <a:t>Exposicion.  </a:t>
             </a:r>
-            <a:pPr indent="0" marL="0">
-              <a:lnSpc>
-                <a:spcPct val="105000"/>
-              </a:lnSpc>
-              <a:buNone/>
-            </a:pPr>
             <a:r>
               <a:rPr lang="en-US" sz="1100" dirty="0">
                 <a:solidFill>
@@ -2491,12 +2295,6 @@
               <a:t>Publica una aplicacion en Internet con la misma superficie de ataque que una empresa grande, sin ninguna de sus capacidades defensivas.
 </a:t>
             </a:r>
-            <a:pPr indent="0" marL="0">
-              <a:lnSpc>
-                <a:spcPct val="105000"/>
-              </a:lnSpc>
-              <a:buNone/>
-            </a:pPr>
             <a:r>
               <a:rPr lang="en-US" sz="1100" b="1" dirty="0">
                 <a:solidFill>
@@ -2508,12 +2306,6 @@
               </a:rPr>
               <a:t>Incentivo.  </a:t>
             </a:r>
-            <a:pPr indent="0" marL="0">
-              <a:lnSpc>
-                <a:spcPct val="105000"/>
-              </a:lnSpc>
-              <a:buNone/>
-            </a:pPr>
             <a:r>
               <a:rPr lang="en-US" sz="1100" dirty="0">
                 <a:solidFill>
@@ -2526,12 +2318,6 @@
               <a:t>Las plataformas internacionales cobran en dolares mas comision por venta: exposicion cambiaria mensual sobre margenes estrechos.
 </a:t>
             </a:r>
-            <a:pPr indent="0" marL="0">
-              <a:lnSpc>
-                <a:spcPct val="105000"/>
-              </a:lnSpc>
-              <a:buNone/>
-            </a:pPr>
             <a:r>
               <a:rPr lang="en-US" sz="1100" b="1" dirty="0">
                 <a:solidFill>
@@ -2543,12 +2329,6 @@
               </a:rPr>
               <a:t>Cumplimiento.  </a:t>
             </a:r>
-            <a:pPr indent="0" marL="0">
-              <a:lnSpc>
-                <a:spcPct val="105000"/>
-              </a:lnSpc>
-              <a:buNone/>
-            </a:pPr>
             <a:r>
               <a:rPr lang="en-US" sz="1100" dirty="0">
                 <a:solidFill>
@@ -2583,6 +2363,13 @@
           </a:solidFill>
           <a:ln/>
         </p:spPr>
+        <p:txBody>
+          <a:bodyPr/>
+          <a:lstStyle/>
+          <a:p>
+            <a:endParaRPr lang="es-GT"/>
+          </a:p>
+        </p:txBody>
       </p:sp>
       <p:sp>
         <p:nvSpPr>
@@ -2605,7 +2392,7 @@
           <a:bodyPr wrap="square" rtlCol="0" anchor="ctr"/>
           <a:lstStyle/>
           <a:p>
-            <a:pPr indent="0" marL="0">
+            <a:pPr marL="0" indent="0">
               <a:buNone/>
             </a:pPr>
             <a:r>
@@ -2644,7 +2431,7 @@
           <a:bodyPr wrap="square" rtlCol="0" anchor="ctr"/>
           <a:lstStyle/>
           <a:p>
-            <a:pPr algn="r" indent="0" marL="0">
+            <a:pPr marL="0" indent="0" algn="r">
               <a:buNone/>
             </a:pPr>
             <a:r>
@@ -2683,7 +2470,7 @@
           <a:bodyPr wrap="square" rtlCol="0" anchor="ctr"/>
           <a:lstStyle/>
           <a:p>
-            <a:pPr indent="0" marL="0">
+            <a:pPr marL="0" indent="0">
               <a:buNone/>
             </a:pPr>
             <a:r>
@@ -2745,6 +2532,13 @@
           </a:solidFill>
           <a:ln/>
         </p:spPr>
+        <p:txBody>
+          <a:bodyPr/>
+          <a:lstStyle/>
+          <a:p>
+            <a:endParaRPr lang="es-GT"/>
+          </a:p>
+        </p:txBody>
       </p:sp>
       <p:sp>
         <p:nvSpPr>
@@ -2765,6 +2559,13 @@
           </a:solidFill>
           <a:ln/>
         </p:spPr>
+        <p:txBody>
+          <a:bodyPr/>
+          <a:lstStyle/>
+          <a:p>
+            <a:endParaRPr lang="es-GT"/>
+          </a:p>
+        </p:txBody>
       </p:sp>
       <p:sp>
         <p:nvSpPr>
@@ -2787,7 +2588,7 @@
           <a:bodyPr wrap="square" rtlCol="0" anchor="ctr"/>
           <a:lstStyle/>
           <a:p>
-            <a:pPr algn="ctr" indent="0" marL="0">
+            <a:pPr marL="0" indent="0" algn="ctr">
               <a:buNone/>
             </a:pPr>
             <a:r>
@@ -2826,7 +2627,7 @@
           <a:bodyPr wrap="square" rtlCol="0" anchor="ctr"/>
           <a:lstStyle/>
           <a:p>
-            <a:pPr indent="0" marL="0">
+            <a:pPr marL="0" indent="0">
               <a:buNone/>
             </a:pPr>
             <a:r>
@@ -2865,7 +2666,7 @@
           <a:bodyPr wrap="square" rtlCol="0" anchor="ctr"/>
           <a:lstStyle/>
           <a:p>
-            <a:pPr indent="0" marL="0">
+            <a:pPr marL="0" indent="0">
               <a:buNone/>
             </a:pPr>
             <a:r>
@@ -2902,6 +2703,13 @@
           </a:solidFill>
           <a:ln/>
         </p:spPr>
+        <p:txBody>
+          <a:bodyPr/>
+          <a:lstStyle/>
+          <a:p>
+            <a:endParaRPr lang="es-GT"/>
+          </a:p>
+        </p:txBody>
       </p:sp>
       <p:sp>
         <p:nvSpPr>
@@ -2924,11 +2732,11 @@
           <a:bodyPr wrap="square" rtlCol="0" anchor="ctr"/>
           <a:lstStyle/>
           <a:p>
-            <a:pPr indent="0" marL="0">
+            <a:pPr marL="0" indent="0">
               <a:buNone/>
             </a:pPr>
             <a:r>
-              <a:rPr lang="en-US" sz="1100" b="1" spc="60" kern="0" dirty="0">
+              <a:rPr lang="en-US" sz="1100" b="1" kern="0" spc="60" dirty="0">
                 <a:solidFill>
                   <a:srgbClr val="FFFFFF"/>
                 </a:solidFill>
@@ -2963,7 +2771,7 @@
           <a:bodyPr wrap="square" rtlCol="0" anchor="t"/>
           <a:lstStyle/>
           <a:p>
-            <a:pPr indent="0" marL="0">
+            <a:pPr marL="0" indent="0">
               <a:lnSpc>
                 <a:spcPct val="100000"/>
               </a:lnSpc>
@@ -2980,12 +2788,6 @@
               </a:rPr>
               <a:t>Hardware.  </a:t>
             </a:r>
-            <a:pPr indent="0" marL="0">
-              <a:lnSpc>
-                <a:spcPct val="100000"/>
-              </a:lnSpc>
-              <a:buNone/>
-            </a:pPr>
             <a:r>
               <a:rPr lang="en-US" sz="1050" dirty="0">
                 <a:solidFill>
@@ -2998,12 +2800,6 @@
               <a:t>Infraestructura virtualizada de un tercero: no hay control fisico del equipo. El perimetro deja de ser una puerta y pasa a ser la interfaz de red publicada.
 </a:t>
             </a:r>
-            <a:pPr indent="0" marL="0">
-              <a:lnSpc>
-                <a:spcPct val="100000"/>
-              </a:lnSpc>
-              <a:buNone/>
-            </a:pPr>
             <a:r>
               <a:rPr lang="en-US" sz="1050" b="1" dirty="0">
                 <a:solidFill>
@@ -3015,12 +2811,6 @@
               </a:rPr>
               <a:t>Software.  </a:t>
             </a:r>
-            <a:pPr indent="0" marL="0">
-              <a:lnSpc>
-                <a:spcPct val="100000"/>
-              </a:lnSpc>
-              <a:buNone/>
-            </a:pPr>
             <a:r>
               <a:rPr lang="en-US" sz="1050" dirty="0">
                 <a:solidFill>
@@ -3038,7 +2828,7 @@
       </p:sp>
       <p:graphicFrame>
         <p:nvGraphicFramePr>
-          <p:cNvPr id="4" name="Table 0"/>
+          <p:cNvPr id="10" name="Table 0"/>
           <p:cNvGraphicFramePr>
             <a:graphicFrameLocks noGrp="1"/>
           </p:cNvGraphicFramePr>
@@ -3052,15 +2842,27 @@
         </p:nvGraphicFramePr>
         <p:xfrm>
           <a:off x="384048" y="2542032"/>
-          <a:ext cx="4114800" cy="914400"/>
+          <a:ext cx="4114800" cy="1325880"/>
         </p:xfrm>
         <a:graphic>
           <a:graphicData uri="http://schemas.openxmlformats.org/drawingml/2006/table">
             <a:tbl>
               <a:tblPr/>
               <a:tblGrid>
-                <a:gridCol w="2971800"/>
-                <a:gridCol w="1143000"/>
+                <a:gridCol w="2971800">
+                  <a:extLst>
+                    <a:ext uri="{9D8B030D-6E8A-4147-A177-3AD203B41FA5}">
+                      <a16:colId xmlns:a16="http://schemas.microsoft.com/office/drawing/2014/main" val="20000"/>
+                    </a:ext>
+                  </a:extLst>
+                </a:gridCol>
+                <a:gridCol w="1143000">
+                  <a:extLst>
+                    <a:ext uri="{9D8B030D-6E8A-4147-A177-3AD203B41FA5}">
+                      <a16:colId xmlns:a16="http://schemas.microsoft.com/office/drawing/2014/main" val="20001"/>
+                    </a:ext>
+                  </a:extLst>
+                </a:gridCol>
               </a:tblGrid>
               <a:tr h="265176">
                 <a:tc>
@@ -3068,7 +2870,7 @@
                     <a:bodyPr/>
                     <a:lstStyle/>
                     <a:p>
-                      <a:pPr algn="l" indent="0" marL="0">
+                      <a:pPr marL="0" indent="0" algn="l">
                         <a:buNone/>
                       </a:pPr>
                       <a:r>
@@ -3089,7 +2891,7 @@
                       </a:endParaRPr>
                     </a:p>
                   </a:txBody>
-                  <a:tcPr marL="91440" marR="91440" marT="45720" marB="45720" anchor="ctr">
+                  <a:tcPr anchor="ctr">
                     <a:lnL w="9525" cap="flat" cmpd="sng" algn="ctr">
                       <a:solidFill>
                         <a:srgbClr val="C8D0DA"/>
@@ -3136,7 +2938,7 @@
                     <a:bodyPr/>
                     <a:lstStyle/>
                     <a:p>
-                      <a:pPr algn="l" indent="0" marL="0">
+                      <a:pPr marL="0" indent="0" algn="l">
                         <a:buNone/>
                       </a:pPr>
                       <a:r>
@@ -3157,7 +2959,7 @@
                       </a:endParaRPr>
                     </a:p>
                   </a:txBody>
-                  <a:tcPr marL="91440" marR="91440" marT="45720" marB="45720" anchor="ctr">
+                  <a:tcPr anchor="ctr">
                     <a:lnL w="9525" cap="flat" cmpd="sng" algn="ctr">
                       <a:solidFill>
                         <a:srgbClr val="C8D0DA"/>
@@ -3199,6 +3001,11 @@
                     </a:solidFill>
                   </a:tcPr>
                 </a:tc>
+                <a:extLst>
+                  <a:ext uri="{0D108BD9-81ED-4DB2-BD59-A6C34878D82A}">
+                    <a16:rowId xmlns:a16="http://schemas.microsoft.com/office/drawing/2014/main" val="10000"/>
+                  </a:ext>
+                </a:extLst>
               </a:tr>
               <a:tr h="265176">
                 <a:tc>
@@ -3206,7 +3013,7 @@
                     <a:bodyPr/>
                     <a:lstStyle/>
                     <a:p>
-                      <a:pPr algn="l" indent="0" marL="0">
+                      <a:pPr marL="0" indent="0" algn="l">
                         <a:buNone/>
                       </a:pPr>
                       <a:r>
@@ -3227,7 +3034,7 @@
                       </a:endParaRPr>
                     </a:p>
                   </a:txBody>
-                  <a:tcPr marL="91440" marR="91440" marT="45720" marB="45720" anchor="ctr">
+                  <a:tcPr anchor="ctr">
                     <a:lnL w="9525" cap="flat" cmpd="sng" algn="ctr">
                       <a:solidFill>
                         <a:srgbClr val="C8D0DA"/>
@@ -3271,7 +3078,7 @@
                     <a:bodyPr/>
                     <a:lstStyle/>
                     <a:p>
-                      <a:pPr algn="r" indent="0" marL="0">
+                      <a:pPr marL="0" indent="0" algn="r">
                         <a:buNone/>
                       </a:pPr>
                       <a:r>
@@ -3292,7 +3099,7 @@
                       </a:endParaRPr>
                     </a:p>
                   </a:txBody>
-                  <a:tcPr marL="91440" marR="91440" marT="45720" marB="45720" anchor="ctr">
+                  <a:tcPr anchor="ctr">
                     <a:lnL w="9525" cap="flat" cmpd="sng" algn="ctr">
                       <a:solidFill>
                         <a:srgbClr val="C8D0DA"/>
@@ -3331,6 +3138,11 @@
                     </a:lnB>
                   </a:tcPr>
                 </a:tc>
+                <a:extLst>
+                  <a:ext uri="{0D108BD9-81ED-4DB2-BD59-A6C34878D82A}">
+                    <a16:rowId xmlns:a16="http://schemas.microsoft.com/office/drawing/2014/main" val="10001"/>
+                  </a:ext>
+                </a:extLst>
               </a:tr>
               <a:tr h="265176">
                 <a:tc>
@@ -3338,7 +3150,7 @@
                     <a:bodyPr/>
                     <a:lstStyle/>
                     <a:p>
-                      <a:pPr algn="l" indent="0" marL="0">
+                      <a:pPr marL="0" indent="0" algn="l">
                         <a:buNone/>
                       </a:pPr>
                       <a:r>
@@ -3359,7 +3171,7 @@
                       </a:endParaRPr>
                     </a:p>
                   </a:txBody>
-                  <a:tcPr marL="91440" marR="91440" marT="45720" marB="45720" anchor="ctr">
+                  <a:tcPr anchor="ctr">
                     <a:lnL w="9525" cap="flat" cmpd="sng" algn="ctr">
                       <a:solidFill>
                         <a:srgbClr val="C8D0DA"/>
@@ -3403,7 +3215,7 @@
                     <a:bodyPr/>
                     <a:lstStyle/>
                     <a:p>
-                      <a:pPr algn="r" indent="0" marL="0">
+                      <a:pPr marL="0" indent="0" algn="r">
                         <a:buNone/>
                       </a:pPr>
                       <a:r>
@@ -3424,7 +3236,7 @@
                       </a:endParaRPr>
                     </a:p>
                   </a:txBody>
-                  <a:tcPr marL="91440" marR="91440" marT="45720" marB="45720" anchor="ctr">
+                  <a:tcPr anchor="ctr">
                     <a:lnL w="9525" cap="flat" cmpd="sng" algn="ctr">
                       <a:solidFill>
                         <a:srgbClr val="C8D0DA"/>
@@ -3463,6 +3275,11 @@
                     </a:lnB>
                   </a:tcPr>
                 </a:tc>
+                <a:extLst>
+                  <a:ext uri="{0D108BD9-81ED-4DB2-BD59-A6C34878D82A}">
+                    <a16:rowId xmlns:a16="http://schemas.microsoft.com/office/drawing/2014/main" val="10002"/>
+                  </a:ext>
+                </a:extLst>
               </a:tr>
               <a:tr h="265176">
                 <a:tc>
@@ -3470,7 +3287,7 @@
                     <a:bodyPr/>
                     <a:lstStyle/>
                     <a:p>
-                      <a:pPr algn="l" indent="0" marL="0">
+                      <a:pPr marL="0" indent="0" algn="l">
                         <a:buNone/>
                       </a:pPr>
                       <a:r>
@@ -3491,7 +3308,7 @@
                       </a:endParaRPr>
                     </a:p>
                   </a:txBody>
-                  <a:tcPr marL="91440" marR="91440" marT="45720" marB="45720" anchor="ctr">
+                  <a:tcPr anchor="ctr">
                     <a:lnL w="9525" cap="flat" cmpd="sng" algn="ctr">
                       <a:solidFill>
                         <a:srgbClr val="C8D0DA"/>
@@ -3535,7 +3352,7 @@
                     <a:bodyPr/>
                     <a:lstStyle/>
                     <a:p>
-                      <a:pPr algn="r" indent="0" marL="0">
+                      <a:pPr marL="0" indent="0" algn="r">
                         <a:buNone/>
                       </a:pPr>
                       <a:r>
@@ -3556,7 +3373,7 @@
                       </a:endParaRPr>
                     </a:p>
                   </a:txBody>
-                  <a:tcPr marL="91440" marR="91440" marT="45720" marB="45720" anchor="ctr">
+                  <a:tcPr anchor="ctr">
                     <a:lnL w="9525" cap="flat" cmpd="sng" algn="ctr">
                       <a:solidFill>
                         <a:srgbClr val="C8D0DA"/>
@@ -3595,6 +3412,11 @@
                     </a:lnB>
                   </a:tcPr>
                 </a:tc>
+                <a:extLst>
+                  <a:ext uri="{0D108BD9-81ED-4DB2-BD59-A6C34878D82A}">
+                    <a16:rowId xmlns:a16="http://schemas.microsoft.com/office/drawing/2014/main" val="10003"/>
+                  </a:ext>
+                </a:extLst>
               </a:tr>
               <a:tr h="265176">
                 <a:tc>
@@ -3602,7 +3424,7 @@
                     <a:bodyPr/>
                     <a:lstStyle/>
                     <a:p>
-                      <a:pPr algn="l" indent="0" marL="0">
+                      <a:pPr marL="0" indent="0" algn="l">
                         <a:buNone/>
                       </a:pPr>
                       <a:r>
@@ -3623,7 +3445,7 @@
                       </a:endParaRPr>
                     </a:p>
                   </a:txBody>
-                  <a:tcPr marL="91440" marR="91440" marT="45720" marB="45720" anchor="ctr">
+                  <a:tcPr anchor="ctr">
                     <a:lnL w="9525" cap="flat" cmpd="sng" algn="ctr">
                       <a:solidFill>
                         <a:srgbClr val="C8D0DA"/>
@@ -3667,7 +3489,7 @@
                     <a:bodyPr/>
                     <a:lstStyle/>
                     <a:p>
-                      <a:pPr algn="r" indent="0" marL="0">
+                      <a:pPr marL="0" indent="0" algn="r">
                         <a:buNone/>
                       </a:pPr>
                       <a:r>
@@ -3688,7 +3510,7 @@
                       </a:endParaRPr>
                     </a:p>
                   </a:txBody>
-                  <a:tcPr marL="91440" marR="91440" marT="45720" marB="45720" anchor="ctr">
+                  <a:tcPr anchor="ctr">
                     <a:lnL w="9525" cap="flat" cmpd="sng" algn="ctr">
                       <a:solidFill>
                         <a:srgbClr val="C8D0DA"/>
@@ -3727,6 +3549,11 @@
                     </a:lnB>
                   </a:tcPr>
                 </a:tc>
+                <a:extLst>
+                  <a:ext uri="{0D108BD9-81ED-4DB2-BD59-A6C34878D82A}">
+                    <a16:rowId xmlns:a16="http://schemas.microsoft.com/office/drawing/2014/main" val="10004"/>
+                  </a:ext>
+                </a:extLst>
               </a:tr>
             </a:tbl>
           </a:graphicData>
@@ -3751,6 +3578,13 @@
           </a:solidFill>
           <a:ln/>
         </p:spPr>
+        <p:txBody>
+          <a:bodyPr/>
+          <a:lstStyle/>
+          <a:p>
+            <a:endParaRPr lang="es-GT"/>
+          </a:p>
+        </p:txBody>
       </p:sp>
       <p:sp>
         <p:nvSpPr>
@@ -3773,11 +3607,11 @@
           <a:bodyPr wrap="square" rtlCol="0" anchor="ctr"/>
           <a:lstStyle/>
           <a:p>
-            <a:pPr indent="0" marL="0">
+            <a:pPr marL="0" indent="0">
               <a:buNone/>
             </a:pPr>
             <a:r>
-              <a:rPr lang="en-US" sz="1100" b="1" spc="60" kern="0" dirty="0">
+              <a:rPr lang="en-US" sz="1100" b="1" kern="0" spc="60" dirty="0">
                 <a:solidFill>
                   <a:srgbClr val="FFFFFF"/>
                 </a:solidFill>
@@ -3793,7 +3627,7 @@
       </p:sp>
       <p:graphicFrame>
         <p:nvGraphicFramePr>
-          <p:cNvPr id="7" name="Table 1"/>
+          <p:cNvPr id="13" name="Table 1"/>
           <p:cNvGraphicFramePr>
             <a:graphicFrameLocks noGrp="1"/>
           </p:cNvGraphicFramePr>
@@ -3807,15 +3641,27 @@
         </p:nvGraphicFramePr>
         <p:xfrm>
           <a:off x="4645152" y="1444752"/>
-          <a:ext cx="4114800" cy="914400"/>
+          <a:ext cx="4114800" cy="1371600"/>
         </p:xfrm>
         <a:graphic>
           <a:graphicData uri="http://schemas.openxmlformats.org/drawingml/2006/table">
             <a:tbl>
               <a:tblPr/>
               <a:tblGrid>
-                <a:gridCol w="2697480"/>
-                <a:gridCol w="1417320"/>
+                <a:gridCol w="2697480">
+                  <a:extLst>
+                    <a:ext uri="{9D8B030D-6E8A-4147-A177-3AD203B41FA5}">
+                      <a16:colId xmlns:a16="http://schemas.microsoft.com/office/drawing/2014/main" val="20000"/>
+                    </a:ext>
+                  </a:extLst>
+                </a:gridCol>
+                <a:gridCol w="1417320">
+                  <a:extLst>
+                    <a:ext uri="{9D8B030D-6E8A-4147-A177-3AD203B41FA5}">
+                      <a16:colId xmlns:a16="http://schemas.microsoft.com/office/drawing/2014/main" val="20001"/>
+                    </a:ext>
+                  </a:extLst>
+                </a:gridCol>
               </a:tblGrid>
               <a:tr h="274320">
                 <a:tc>
@@ -3823,7 +3669,7 @@
                     <a:bodyPr/>
                     <a:lstStyle/>
                     <a:p>
-                      <a:pPr algn="l" indent="0" marL="0">
+                      <a:pPr marL="0" indent="0" algn="l">
                         <a:buNone/>
                       </a:pPr>
                       <a:r>
@@ -3844,7 +3690,7 @@
                       </a:endParaRPr>
                     </a:p>
                   </a:txBody>
-                  <a:tcPr marL="91440" marR="91440" marT="45720" marB="45720" anchor="ctr">
+                  <a:tcPr anchor="ctr">
                     <a:lnL w="9525" cap="flat" cmpd="sng" algn="ctr">
                       <a:solidFill>
                         <a:srgbClr val="C8D0DA"/>
@@ -3891,7 +3737,7 @@
                     <a:bodyPr/>
                     <a:lstStyle/>
                     <a:p>
-                      <a:pPr algn="l" indent="0" marL="0">
+                      <a:pPr marL="0" indent="0" algn="l">
                         <a:buNone/>
                       </a:pPr>
                       <a:r>
@@ -3912,7 +3758,7 @@
                       </a:endParaRPr>
                     </a:p>
                   </a:txBody>
-                  <a:tcPr marL="91440" marR="91440" marT="45720" marB="45720" anchor="ctr">
+                  <a:tcPr anchor="ctr">
                     <a:lnL w="9525" cap="flat" cmpd="sng" algn="ctr">
                       <a:solidFill>
                         <a:srgbClr val="C8D0DA"/>
@@ -3954,6 +3800,11 @@
                     </a:solidFill>
                   </a:tcPr>
                 </a:tc>
+                <a:extLst>
+                  <a:ext uri="{0D108BD9-81ED-4DB2-BD59-A6C34878D82A}">
+                    <a16:rowId xmlns:a16="http://schemas.microsoft.com/office/drawing/2014/main" val="10000"/>
+                  </a:ext>
+                </a:extLst>
               </a:tr>
               <a:tr h="274320">
                 <a:tc>
@@ -3961,7 +3812,7 @@
                     <a:bodyPr/>
                     <a:lstStyle/>
                     <a:p>
-                      <a:pPr algn="l" indent="0" marL="0">
+                      <a:pPr marL="0" indent="0" algn="l">
                         <a:buNone/>
                       </a:pPr>
                       <a:r>
@@ -3982,7 +3833,7 @@
                       </a:endParaRPr>
                     </a:p>
                   </a:txBody>
-                  <a:tcPr marL="91440" marR="91440" marT="45720" marB="45720" anchor="ctr">
+                  <a:tcPr anchor="ctr">
                     <a:lnL w="9525" cap="flat" cmpd="sng" algn="ctr">
                       <a:solidFill>
                         <a:srgbClr val="C8D0DA"/>
@@ -4026,7 +3877,7 @@
                     <a:bodyPr/>
                     <a:lstStyle/>
                     <a:p>
-                      <a:pPr algn="ctr" indent="0" marL="0">
+                      <a:pPr marL="0" indent="0" algn="ctr">
                         <a:buNone/>
                       </a:pPr>
                       <a:r>
@@ -4047,7 +3898,7 @@
                       </a:endParaRPr>
                     </a:p>
                   </a:txBody>
-                  <a:tcPr marL="91440" marR="91440" marT="45720" marB="45720" anchor="ctr">
+                  <a:tcPr anchor="ctr">
                     <a:lnL w="9525" cap="flat" cmpd="sng" algn="ctr">
                       <a:solidFill>
                         <a:srgbClr val="C8D0DA"/>
@@ -4086,6 +3937,11 @@
                     </a:lnB>
                   </a:tcPr>
                 </a:tc>
+                <a:extLst>
+                  <a:ext uri="{0D108BD9-81ED-4DB2-BD59-A6C34878D82A}">
+                    <a16:rowId xmlns:a16="http://schemas.microsoft.com/office/drawing/2014/main" val="10001"/>
+                  </a:ext>
+                </a:extLst>
               </a:tr>
               <a:tr h="274320">
                 <a:tc>
@@ -4093,7 +3949,7 @@
                     <a:bodyPr/>
                     <a:lstStyle/>
                     <a:p>
-                      <a:pPr algn="l" indent="0" marL="0">
+                      <a:pPr marL="0" indent="0" algn="l">
                         <a:buNone/>
                       </a:pPr>
                       <a:r>
@@ -4114,7 +3970,7 @@
                       </a:endParaRPr>
                     </a:p>
                   </a:txBody>
-                  <a:tcPr marL="91440" marR="91440" marT="45720" marB="45720" anchor="ctr">
+                  <a:tcPr anchor="ctr">
                     <a:lnL w="9525" cap="flat" cmpd="sng" algn="ctr">
                       <a:solidFill>
                         <a:srgbClr val="C8D0DA"/>
@@ -4158,7 +4014,7 @@
                     <a:bodyPr/>
                     <a:lstStyle/>
                     <a:p>
-                      <a:pPr algn="ctr" indent="0" marL="0">
+                      <a:pPr marL="0" indent="0" algn="ctr">
                         <a:buNone/>
                       </a:pPr>
                       <a:r>
@@ -4179,7 +4035,7 @@
                       </a:endParaRPr>
                     </a:p>
                   </a:txBody>
-                  <a:tcPr marL="91440" marR="91440" marT="45720" marB="45720" anchor="ctr">
+                  <a:tcPr anchor="ctr">
                     <a:lnL w="9525" cap="flat" cmpd="sng" algn="ctr">
                       <a:solidFill>
                         <a:srgbClr val="C8D0DA"/>
@@ -4218,6 +4074,11 @@
                     </a:lnB>
                   </a:tcPr>
                 </a:tc>
+                <a:extLst>
+                  <a:ext uri="{0D108BD9-81ED-4DB2-BD59-A6C34878D82A}">
+                    <a16:rowId xmlns:a16="http://schemas.microsoft.com/office/drawing/2014/main" val="10002"/>
+                  </a:ext>
+                </a:extLst>
               </a:tr>
               <a:tr h="274320">
                 <a:tc>
@@ -4225,7 +4086,7 @@
                     <a:bodyPr/>
                     <a:lstStyle/>
                     <a:p>
-                      <a:pPr algn="l" indent="0" marL="0">
+                      <a:pPr marL="0" indent="0" algn="l">
                         <a:buNone/>
                       </a:pPr>
                       <a:r>
@@ -4246,7 +4107,7 @@
                       </a:endParaRPr>
                     </a:p>
                   </a:txBody>
-                  <a:tcPr marL="91440" marR="91440" marT="45720" marB="45720" anchor="ctr">
+                  <a:tcPr anchor="ctr">
                     <a:lnL w="9525" cap="flat" cmpd="sng" algn="ctr">
                       <a:solidFill>
                         <a:srgbClr val="C8D0DA"/>
@@ -4290,7 +4151,7 @@
                     <a:bodyPr/>
                     <a:lstStyle/>
                     <a:p>
-                      <a:pPr algn="ctr" indent="0" marL="0">
+                      <a:pPr marL="0" indent="0" algn="ctr">
                         <a:buNone/>
                       </a:pPr>
                       <a:r>
@@ -4311,7 +4172,7 @@
                       </a:endParaRPr>
                     </a:p>
                   </a:txBody>
-                  <a:tcPr marL="91440" marR="91440" marT="45720" marB="45720" anchor="ctr">
+                  <a:tcPr anchor="ctr">
                     <a:lnL w="9525" cap="flat" cmpd="sng" algn="ctr">
                       <a:solidFill>
                         <a:srgbClr val="C8D0DA"/>
@@ -4350,6 +4211,11 @@
                     </a:lnB>
                   </a:tcPr>
                 </a:tc>
+                <a:extLst>
+                  <a:ext uri="{0D108BD9-81ED-4DB2-BD59-A6C34878D82A}">
+                    <a16:rowId xmlns:a16="http://schemas.microsoft.com/office/drawing/2014/main" val="10003"/>
+                  </a:ext>
+                </a:extLst>
               </a:tr>
               <a:tr h="274320">
                 <a:tc>
@@ -4357,7 +4223,7 @@
                     <a:bodyPr/>
                     <a:lstStyle/>
                     <a:p>
-                      <a:pPr algn="l" indent="0" marL="0">
+                      <a:pPr marL="0" indent="0" algn="l">
                         <a:buNone/>
                       </a:pPr>
                       <a:r>
@@ -4378,7 +4244,7 @@
                       </a:endParaRPr>
                     </a:p>
                   </a:txBody>
-                  <a:tcPr marL="91440" marR="91440" marT="45720" marB="45720" anchor="ctr">
+                  <a:tcPr anchor="ctr">
                     <a:lnL w="9525" cap="flat" cmpd="sng" algn="ctr">
                       <a:solidFill>
                         <a:srgbClr val="C8D0DA"/>
@@ -4422,7 +4288,7 @@
                     <a:bodyPr/>
                     <a:lstStyle/>
                     <a:p>
-                      <a:pPr algn="ctr" indent="0" marL="0">
+                      <a:pPr marL="0" indent="0" algn="ctr">
                         <a:buNone/>
                       </a:pPr>
                       <a:r>
@@ -4443,7 +4309,7 @@
                       </a:endParaRPr>
                     </a:p>
                   </a:txBody>
-                  <a:tcPr marL="91440" marR="91440" marT="45720" marB="45720" anchor="ctr">
+                  <a:tcPr anchor="ctr">
                     <a:lnL w="9525" cap="flat" cmpd="sng" algn="ctr">
                       <a:solidFill>
                         <a:srgbClr val="C8D0DA"/>
@@ -4482,6 +4348,11 @@
                     </a:lnB>
                   </a:tcPr>
                 </a:tc>
+                <a:extLst>
+                  <a:ext uri="{0D108BD9-81ED-4DB2-BD59-A6C34878D82A}">
+                    <a16:rowId xmlns:a16="http://schemas.microsoft.com/office/drawing/2014/main" val="10004"/>
+                  </a:ext>
+                </a:extLst>
               </a:tr>
             </a:tbl>
           </a:graphicData>
@@ -4511,6 +4382,13 @@
             <a:prstDash val="solid"/>
           </a:ln>
         </p:spPr>
+        <p:txBody>
+          <a:bodyPr/>
+          <a:lstStyle/>
+          <a:p>
+            <a:endParaRPr lang="es-GT"/>
+          </a:p>
+        </p:txBody>
       </p:sp>
       <p:sp>
         <p:nvSpPr>
@@ -4533,7 +4411,7 @@
           <a:bodyPr wrap="square" rtlCol="0" anchor="ctr"/>
           <a:lstStyle/>
           <a:p>
-            <a:pPr indent="0" marL="0">
+            <a:pPr marL="0" indent="0">
               <a:buNone/>
             </a:pPr>
             <a:r>
@@ -4547,9 +4425,6 @@
               </a:rPr>
               <a:t>La informacion comprometida no es del comerciante: </a:t>
             </a:r>
-            <a:pPr indent="0" marL="0">
-              <a:buNone/>
-            </a:pPr>
             <a:r>
               <a:rPr lang="en-US" sz="1050" dirty="0">
                 <a:solidFill>
@@ -4584,6 +4459,13 @@
           </a:solidFill>
           <a:ln/>
         </p:spPr>
+        <p:txBody>
+          <a:bodyPr/>
+          <a:lstStyle/>
+          <a:p>
+            <a:endParaRPr lang="es-GT"/>
+          </a:p>
+        </p:txBody>
       </p:sp>
       <p:sp>
         <p:nvSpPr>
@@ -4606,7 +4488,7 @@
           <a:bodyPr wrap="square" rtlCol="0" anchor="ctr"/>
           <a:lstStyle/>
           <a:p>
-            <a:pPr indent="0" marL="0">
+            <a:pPr marL="0" indent="0">
               <a:buNone/>
             </a:pPr>
             <a:r>
@@ -4645,7 +4527,7 @@
           <a:bodyPr wrap="square" rtlCol="0" anchor="ctr"/>
           <a:lstStyle/>
           <a:p>
-            <a:pPr algn="r" indent="0" marL="0">
+            <a:pPr marL="0" indent="0" algn="r">
               <a:buNone/>
             </a:pPr>
             <a:r>
@@ -4684,7 +4566,7 @@
           <a:bodyPr wrap="square" rtlCol="0" anchor="ctr"/>
           <a:lstStyle/>
           <a:p>
-            <a:pPr indent="0" marL="0">
+            <a:pPr marL="0" indent="0">
               <a:buNone/>
             </a:pPr>
             <a:r>
@@ -4746,6 +4628,13 @@
           </a:solidFill>
           <a:ln/>
         </p:spPr>
+        <p:txBody>
+          <a:bodyPr/>
+          <a:lstStyle/>
+          <a:p>
+            <a:endParaRPr lang="es-GT"/>
+          </a:p>
+        </p:txBody>
       </p:sp>
       <p:sp>
         <p:nvSpPr>
@@ -4766,6 +4655,13 @@
           </a:solidFill>
           <a:ln/>
         </p:spPr>
+        <p:txBody>
+          <a:bodyPr/>
+          <a:lstStyle/>
+          <a:p>
+            <a:endParaRPr lang="es-GT"/>
+          </a:p>
+        </p:txBody>
       </p:sp>
       <p:sp>
         <p:nvSpPr>
@@ -4788,7 +4684,7 @@
           <a:bodyPr wrap="square" rtlCol="0" anchor="ctr"/>
           <a:lstStyle/>
           <a:p>
-            <a:pPr algn="ctr" indent="0" marL="0">
+            <a:pPr marL="0" indent="0" algn="ctr">
               <a:buNone/>
             </a:pPr>
             <a:r>
@@ -4827,7 +4723,7 @@
           <a:bodyPr wrap="square" rtlCol="0" anchor="ctr"/>
           <a:lstStyle/>
           <a:p>
-            <a:pPr indent="0" marL="0">
+            <a:pPr marL="0" indent="0">
               <a:buNone/>
             </a:pPr>
             <a:r>
@@ -4866,7 +4762,7 @@
           <a:bodyPr wrap="square" rtlCol="0" anchor="ctr"/>
           <a:lstStyle/>
           <a:p>
-            <a:pPr indent="0" marL="0">
+            <a:pPr marL="0" indent="0">
               <a:buNone/>
             </a:pPr>
             <a:r>
@@ -4886,7 +4782,7 @@
       </p:sp>
       <p:graphicFrame>
         <p:nvGraphicFramePr>
-          <p:cNvPr id="5" name="Table 0"/>
+          <p:cNvPr id="7" name="Table 0"/>
           <p:cNvGraphicFramePr>
             <a:graphicFrameLocks noGrp="1"/>
           </p:cNvGraphicFramePr>
@@ -4900,19 +4796,55 @@
         </p:nvGraphicFramePr>
         <p:xfrm>
           <a:off x="384048" y="1097280"/>
-          <a:ext cx="8375904" cy="914400"/>
+          <a:ext cx="8375904" cy="2371344"/>
         </p:xfrm>
         <a:graphic>
           <a:graphicData uri="http://schemas.openxmlformats.org/drawingml/2006/table">
             <a:tbl>
               <a:tblPr/>
               <a:tblGrid>
-                <a:gridCol w="1600200"/>
-                <a:gridCol w="1572768"/>
-                <a:gridCol w="1508760"/>
-                <a:gridCol w="1664208"/>
-                <a:gridCol w="1115568"/>
-                <a:gridCol w="914400"/>
+                <a:gridCol w="1600200">
+                  <a:extLst>
+                    <a:ext uri="{9D8B030D-6E8A-4147-A177-3AD203B41FA5}">
+                      <a16:colId xmlns:a16="http://schemas.microsoft.com/office/drawing/2014/main" val="20000"/>
+                    </a:ext>
+                  </a:extLst>
+                </a:gridCol>
+                <a:gridCol w="1572768">
+                  <a:extLst>
+                    <a:ext uri="{9D8B030D-6E8A-4147-A177-3AD203B41FA5}">
+                      <a16:colId xmlns:a16="http://schemas.microsoft.com/office/drawing/2014/main" val="20001"/>
+                    </a:ext>
+                  </a:extLst>
+                </a:gridCol>
+                <a:gridCol w="1508760">
+                  <a:extLst>
+                    <a:ext uri="{9D8B030D-6E8A-4147-A177-3AD203B41FA5}">
+                      <a16:colId xmlns:a16="http://schemas.microsoft.com/office/drawing/2014/main" val="20002"/>
+                    </a:ext>
+                  </a:extLst>
+                </a:gridCol>
+                <a:gridCol w="1664208">
+                  <a:extLst>
+                    <a:ext uri="{9D8B030D-6E8A-4147-A177-3AD203B41FA5}">
+                      <a16:colId xmlns:a16="http://schemas.microsoft.com/office/drawing/2014/main" val="20003"/>
+                    </a:ext>
+                  </a:extLst>
+                </a:gridCol>
+                <a:gridCol w="1115568">
+                  <a:extLst>
+                    <a:ext uri="{9D8B030D-6E8A-4147-A177-3AD203B41FA5}">
+                      <a16:colId xmlns:a16="http://schemas.microsoft.com/office/drawing/2014/main" val="20004"/>
+                    </a:ext>
+                  </a:extLst>
+                </a:gridCol>
+                <a:gridCol w="914400">
+                  <a:extLst>
+                    <a:ext uri="{9D8B030D-6E8A-4147-A177-3AD203B41FA5}">
+                      <a16:colId xmlns:a16="http://schemas.microsoft.com/office/drawing/2014/main" val="20005"/>
+                    </a:ext>
+                  </a:extLst>
+                </a:gridCol>
               </a:tblGrid>
               <a:tr h="329184">
                 <a:tc>
@@ -4920,7 +4852,7 @@
                     <a:bodyPr/>
                     <a:lstStyle/>
                     <a:p>
-                      <a:pPr algn="l" indent="0" marL="0">
+                      <a:pPr marL="0" indent="0" algn="l">
                         <a:buNone/>
                       </a:pPr>
                       <a:r>
@@ -4941,7 +4873,7 @@
                       </a:endParaRPr>
                     </a:p>
                   </a:txBody>
-                  <a:tcPr marL="91440" marR="91440" marT="45720" marB="45720" anchor="ctr">
+                  <a:tcPr anchor="ctr">
                     <a:lnL w="9525" cap="flat" cmpd="sng" algn="ctr">
                       <a:solidFill>
                         <a:srgbClr val="C8D0DA"/>
@@ -4988,7 +4920,7 @@
                     <a:bodyPr/>
                     <a:lstStyle/>
                     <a:p>
-                      <a:pPr algn="l" indent="0" marL="0">
+                      <a:pPr marL="0" indent="0" algn="l">
                         <a:buNone/>
                       </a:pPr>
                       <a:r>
@@ -5009,7 +4941,7 @@
                       </a:endParaRPr>
                     </a:p>
                   </a:txBody>
-                  <a:tcPr marL="91440" marR="91440" marT="45720" marB="45720" anchor="ctr">
+                  <a:tcPr anchor="ctr">
                     <a:lnL w="9525" cap="flat" cmpd="sng" algn="ctr">
                       <a:solidFill>
                         <a:srgbClr val="C8D0DA"/>
@@ -5056,7 +4988,7 @@
                     <a:bodyPr/>
                     <a:lstStyle/>
                     <a:p>
-                      <a:pPr algn="l" indent="0" marL="0">
+                      <a:pPr marL="0" indent="0" algn="l">
                         <a:buNone/>
                       </a:pPr>
                       <a:r>
@@ -5077,7 +5009,7 @@
                       </a:endParaRPr>
                     </a:p>
                   </a:txBody>
-                  <a:tcPr marL="91440" marR="91440" marT="45720" marB="45720" anchor="ctr">
+                  <a:tcPr anchor="ctr">
                     <a:lnL w="9525" cap="flat" cmpd="sng" algn="ctr">
                       <a:solidFill>
                         <a:srgbClr val="C8D0DA"/>
@@ -5124,7 +5056,7 @@
                     <a:bodyPr/>
                     <a:lstStyle/>
                     <a:p>
-                      <a:pPr algn="l" indent="0" marL="0">
+                      <a:pPr marL="0" indent="0" algn="l">
                         <a:buNone/>
                       </a:pPr>
                       <a:r>
@@ -5145,7 +5077,7 @@
                       </a:endParaRPr>
                     </a:p>
                   </a:txBody>
-                  <a:tcPr marL="91440" marR="91440" marT="45720" marB="45720" anchor="ctr">
+                  <a:tcPr anchor="ctr">
                     <a:lnL w="9525" cap="flat" cmpd="sng" algn="ctr">
                       <a:solidFill>
                         <a:srgbClr val="C8D0DA"/>
@@ -5192,7 +5124,7 @@
                     <a:bodyPr/>
                     <a:lstStyle/>
                     <a:p>
-                      <a:pPr algn="l" indent="0" marL="0">
+                      <a:pPr marL="0" indent="0" algn="l">
                         <a:buNone/>
                       </a:pPr>
                       <a:r>
@@ -5213,7 +5145,7 @@
                       </a:endParaRPr>
                     </a:p>
                   </a:txBody>
-                  <a:tcPr marL="91440" marR="91440" marT="45720" marB="45720" anchor="ctr">
+                  <a:tcPr anchor="ctr">
                     <a:lnL w="9525" cap="flat" cmpd="sng" algn="ctr">
                       <a:solidFill>
                         <a:srgbClr val="C8D0DA"/>
@@ -5260,7 +5192,7 @@
                     <a:bodyPr/>
                     <a:lstStyle/>
                     <a:p>
-                      <a:pPr algn="l" indent="0" marL="0">
+                      <a:pPr marL="0" indent="0" algn="l">
                         <a:buNone/>
                       </a:pPr>
                       <a:r>
@@ -5281,7 +5213,7 @@
                       </a:endParaRPr>
                     </a:p>
                   </a:txBody>
-                  <a:tcPr marL="91440" marR="91440" marT="45720" marB="45720" anchor="ctr">
+                  <a:tcPr anchor="ctr">
                     <a:lnL w="9525" cap="flat" cmpd="sng" algn="ctr">
                       <a:solidFill>
                         <a:srgbClr val="C8D0DA"/>
@@ -5323,6 +5255,11 @@
                     </a:solidFill>
                   </a:tcPr>
                 </a:tc>
+                <a:extLst>
+                  <a:ext uri="{0D108BD9-81ED-4DB2-BD59-A6C34878D82A}">
+                    <a16:rowId xmlns:a16="http://schemas.microsoft.com/office/drawing/2014/main" val="10000"/>
+                  </a:ext>
+                </a:extLst>
               </a:tr>
               <a:tr h="329184">
                 <a:tc>
@@ -5330,7 +5267,7 @@
                     <a:bodyPr/>
                     <a:lstStyle/>
                     <a:p>
-                      <a:pPr algn="l" indent="0" marL="0">
+                      <a:pPr marL="0" indent="0" algn="l">
                         <a:buNone/>
                       </a:pPr>
                       <a:r>
@@ -5351,7 +5288,7 @@
                       </a:endParaRPr>
                     </a:p>
                   </a:txBody>
-                  <a:tcPr marL="91440" marR="91440" marT="45720" marB="45720" anchor="ctr">
+                  <a:tcPr anchor="ctr">
                     <a:lnL w="9525" cap="flat" cmpd="sng" algn="ctr">
                       <a:solidFill>
                         <a:srgbClr val="C8D0DA"/>
@@ -5395,7 +5332,7 @@
                     <a:bodyPr/>
                     <a:lstStyle/>
                     <a:p>
-                      <a:pPr algn="l" indent="0" marL="0">
+                      <a:pPr marL="0" indent="0" algn="l">
                         <a:buNone/>
                       </a:pPr>
                       <a:r>
@@ -5416,7 +5353,7 @@
                       </a:endParaRPr>
                     </a:p>
                   </a:txBody>
-                  <a:tcPr marL="91440" marR="91440" marT="45720" marB="45720" anchor="ctr">
+                  <a:tcPr anchor="ctr">
                     <a:lnL w="9525" cap="flat" cmpd="sng" algn="ctr">
                       <a:solidFill>
                         <a:srgbClr val="C8D0DA"/>
@@ -5460,7 +5397,7 @@
                     <a:bodyPr/>
                     <a:lstStyle/>
                     <a:p>
-                      <a:pPr algn="l" indent="0" marL="0">
+                      <a:pPr marL="0" indent="0" algn="l">
                         <a:buNone/>
                       </a:pPr>
                       <a:r>
@@ -5481,7 +5418,7 @@
                       </a:endParaRPr>
                     </a:p>
                   </a:txBody>
-                  <a:tcPr marL="91440" marR="91440" marT="45720" marB="45720" anchor="ctr">
+                  <a:tcPr anchor="ctr">
                     <a:lnL w="9525" cap="flat" cmpd="sng" algn="ctr">
                       <a:solidFill>
                         <a:srgbClr val="C8D0DA"/>
@@ -5525,7 +5462,7 @@
                     <a:bodyPr/>
                     <a:lstStyle/>
                     <a:p>
-                      <a:pPr algn="l" indent="0" marL="0">
+                      <a:pPr marL="0" indent="0" algn="l">
                         <a:buNone/>
                       </a:pPr>
                       <a:r>
@@ -5546,7 +5483,7 @@
                       </a:endParaRPr>
                     </a:p>
                   </a:txBody>
-                  <a:tcPr marL="91440" marR="91440" marT="45720" marB="45720" anchor="ctr">
+                  <a:tcPr anchor="ctr">
                     <a:lnL w="9525" cap="flat" cmpd="sng" algn="ctr">
                       <a:solidFill>
                         <a:srgbClr val="C8D0DA"/>
@@ -5590,7 +5527,7 @@
                     <a:bodyPr/>
                     <a:lstStyle/>
                     <a:p>
-                      <a:pPr algn="ctr" indent="0" marL="0">
+                      <a:pPr marL="0" indent="0" algn="ctr">
                         <a:buNone/>
                       </a:pPr>
                       <a:r>
@@ -5611,7 +5548,7 @@
                       </a:endParaRPr>
                     </a:p>
                   </a:txBody>
-                  <a:tcPr marL="91440" marR="91440" marT="45720" marB="45720" anchor="ctr">
+                  <a:tcPr anchor="ctr">
                     <a:lnL w="9525" cap="flat" cmpd="sng" algn="ctr">
                       <a:solidFill>
                         <a:srgbClr val="C8D0DA"/>
@@ -5655,7 +5592,7 @@
                     <a:bodyPr/>
                     <a:lstStyle/>
                     <a:p>
-                      <a:pPr algn="ctr" indent="0" marL="0">
+                      <a:pPr marL="0" indent="0" algn="ctr">
                         <a:buNone/>
                       </a:pPr>
                       <a:r>
@@ -5676,7 +5613,7 @@
                       </a:endParaRPr>
                     </a:p>
                   </a:txBody>
-                  <a:tcPr marL="91440" marR="91440" marT="45720" marB="45720" anchor="ctr">
+                  <a:tcPr anchor="ctr">
                     <a:lnL w="9525" cap="flat" cmpd="sng" algn="ctr">
                       <a:solidFill>
                         <a:srgbClr val="C8D0DA"/>
@@ -5715,6 +5652,11 @@
                     </a:lnB>
                   </a:tcPr>
                 </a:tc>
+                <a:extLst>
+                  <a:ext uri="{0D108BD9-81ED-4DB2-BD59-A6C34878D82A}">
+                    <a16:rowId xmlns:a16="http://schemas.microsoft.com/office/drawing/2014/main" val="10001"/>
+                  </a:ext>
+                </a:extLst>
               </a:tr>
               <a:tr h="329184">
                 <a:tc>
@@ -5722,7 +5664,7 @@
                     <a:bodyPr/>
                     <a:lstStyle/>
                     <a:p>
-                      <a:pPr algn="l" indent="0" marL="0">
+                      <a:pPr marL="0" indent="0" algn="l">
                         <a:buNone/>
                       </a:pPr>
                       <a:r>
@@ -5743,7 +5685,7 @@
                       </a:endParaRPr>
                     </a:p>
                   </a:txBody>
-                  <a:tcPr marL="91440" marR="91440" marT="45720" marB="45720" anchor="ctr">
+                  <a:tcPr anchor="ctr">
                     <a:lnL w="9525" cap="flat" cmpd="sng" algn="ctr">
                       <a:solidFill>
                         <a:srgbClr val="C8D0DA"/>
@@ -5787,7 +5729,7 @@
                     <a:bodyPr/>
                     <a:lstStyle/>
                     <a:p>
-                      <a:pPr algn="l" indent="0" marL="0">
+                      <a:pPr marL="0" indent="0" algn="l">
                         <a:buNone/>
                       </a:pPr>
                       <a:r>
@@ -5808,7 +5750,7 @@
                       </a:endParaRPr>
                     </a:p>
                   </a:txBody>
-                  <a:tcPr marL="91440" marR="91440" marT="45720" marB="45720" anchor="ctr">
+                  <a:tcPr anchor="ctr">
                     <a:lnL w="9525" cap="flat" cmpd="sng" algn="ctr">
                       <a:solidFill>
                         <a:srgbClr val="C8D0DA"/>
@@ -5852,7 +5794,7 @@
                     <a:bodyPr/>
                     <a:lstStyle/>
                     <a:p>
-                      <a:pPr algn="l" indent="0" marL="0">
+                      <a:pPr marL="0" indent="0" algn="l">
                         <a:buNone/>
                       </a:pPr>
                       <a:r>
@@ -5873,7 +5815,7 @@
                       </a:endParaRPr>
                     </a:p>
                   </a:txBody>
-                  <a:tcPr marL="91440" marR="91440" marT="45720" marB="45720" anchor="ctr">
+                  <a:tcPr anchor="ctr">
                     <a:lnL w="9525" cap="flat" cmpd="sng" algn="ctr">
                       <a:solidFill>
                         <a:srgbClr val="C8D0DA"/>
@@ -5917,7 +5859,7 @@
                     <a:bodyPr/>
                     <a:lstStyle/>
                     <a:p>
-                      <a:pPr algn="l" indent="0" marL="0">
+                      <a:pPr marL="0" indent="0" algn="l">
                         <a:buNone/>
                       </a:pPr>
                       <a:r>
@@ -5938,7 +5880,7 @@
                       </a:endParaRPr>
                     </a:p>
                   </a:txBody>
-                  <a:tcPr marL="91440" marR="91440" marT="45720" marB="45720" anchor="ctr">
+                  <a:tcPr anchor="ctr">
                     <a:lnL w="9525" cap="flat" cmpd="sng" algn="ctr">
                       <a:solidFill>
                         <a:srgbClr val="C8D0DA"/>
@@ -5982,7 +5924,7 @@
                     <a:bodyPr/>
                     <a:lstStyle/>
                     <a:p>
-                      <a:pPr algn="ctr" indent="0" marL="0">
+                      <a:pPr marL="0" indent="0" algn="ctr">
                         <a:buNone/>
                       </a:pPr>
                       <a:r>
@@ -6003,7 +5945,7 @@
                       </a:endParaRPr>
                     </a:p>
                   </a:txBody>
-                  <a:tcPr marL="91440" marR="91440" marT="45720" marB="45720" anchor="ctr">
+                  <a:tcPr anchor="ctr">
                     <a:lnL w="9525" cap="flat" cmpd="sng" algn="ctr">
                       <a:solidFill>
                         <a:srgbClr val="C8D0DA"/>
@@ -6047,7 +5989,7 @@
                     <a:bodyPr/>
                     <a:lstStyle/>
                     <a:p>
-                      <a:pPr algn="ctr" indent="0" marL="0">
+                      <a:pPr marL="0" indent="0" algn="ctr">
                         <a:buNone/>
                       </a:pPr>
                       <a:r>
@@ -6068,7 +6010,7 @@
                       </a:endParaRPr>
                     </a:p>
                   </a:txBody>
-                  <a:tcPr marL="91440" marR="91440" marT="45720" marB="45720" anchor="ctr">
+                  <a:tcPr anchor="ctr">
                     <a:lnL w="9525" cap="flat" cmpd="sng" algn="ctr">
                       <a:solidFill>
                         <a:srgbClr val="C8D0DA"/>
@@ -6107,6 +6049,11 @@
                     </a:lnB>
                   </a:tcPr>
                 </a:tc>
+                <a:extLst>
+                  <a:ext uri="{0D108BD9-81ED-4DB2-BD59-A6C34878D82A}">
+                    <a16:rowId xmlns:a16="http://schemas.microsoft.com/office/drawing/2014/main" val="10002"/>
+                  </a:ext>
+                </a:extLst>
               </a:tr>
               <a:tr h="329184">
                 <a:tc>
@@ -6114,7 +6061,7 @@
                     <a:bodyPr/>
                     <a:lstStyle/>
                     <a:p>
-                      <a:pPr algn="l" indent="0" marL="0">
+                      <a:pPr marL="0" indent="0" algn="l">
                         <a:buNone/>
                       </a:pPr>
                       <a:r>
@@ -6135,7 +6082,7 @@
                       </a:endParaRPr>
                     </a:p>
                   </a:txBody>
-                  <a:tcPr marL="91440" marR="91440" marT="45720" marB="45720" anchor="ctr">
+                  <a:tcPr anchor="ctr">
                     <a:lnL w="9525" cap="flat" cmpd="sng" algn="ctr">
                       <a:solidFill>
                         <a:srgbClr val="C8D0DA"/>
@@ -6179,7 +6126,7 @@
                     <a:bodyPr/>
                     <a:lstStyle/>
                     <a:p>
-                      <a:pPr algn="l" indent="0" marL="0">
+                      <a:pPr marL="0" indent="0" algn="l">
                         <a:buNone/>
                       </a:pPr>
                       <a:r>
@@ -6200,7 +6147,7 @@
                       </a:endParaRPr>
                     </a:p>
                   </a:txBody>
-                  <a:tcPr marL="91440" marR="91440" marT="45720" marB="45720" anchor="ctr">
+                  <a:tcPr anchor="ctr">
                     <a:lnL w="9525" cap="flat" cmpd="sng" algn="ctr">
                       <a:solidFill>
                         <a:srgbClr val="C8D0DA"/>
@@ -6244,7 +6191,7 @@
                     <a:bodyPr/>
                     <a:lstStyle/>
                     <a:p>
-                      <a:pPr algn="l" indent="0" marL="0">
+                      <a:pPr marL="0" indent="0" algn="l">
                         <a:buNone/>
                       </a:pPr>
                       <a:r>
@@ -6265,7 +6212,7 @@
                       </a:endParaRPr>
                     </a:p>
                   </a:txBody>
-                  <a:tcPr marL="91440" marR="91440" marT="45720" marB="45720" anchor="ctr">
+                  <a:tcPr anchor="ctr">
                     <a:lnL w="9525" cap="flat" cmpd="sng" algn="ctr">
                       <a:solidFill>
                         <a:srgbClr val="C8D0DA"/>
@@ -6309,7 +6256,7 @@
                     <a:bodyPr/>
                     <a:lstStyle/>
                     <a:p>
-                      <a:pPr algn="l" indent="0" marL="0">
+                      <a:pPr marL="0" indent="0" algn="l">
                         <a:buNone/>
                       </a:pPr>
                       <a:r>
@@ -6330,7 +6277,7 @@
                       </a:endParaRPr>
                     </a:p>
                   </a:txBody>
-                  <a:tcPr marL="91440" marR="91440" marT="45720" marB="45720" anchor="ctr">
+                  <a:tcPr anchor="ctr">
                     <a:lnL w="9525" cap="flat" cmpd="sng" algn="ctr">
                       <a:solidFill>
                         <a:srgbClr val="C8D0DA"/>
@@ -6374,7 +6321,7 @@
                     <a:bodyPr/>
                     <a:lstStyle/>
                     <a:p>
-                      <a:pPr algn="ctr" indent="0" marL="0">
+                      <a:pPr marL="0" indent="0" algn="ctr">
                         <a:buNone/>
                       </a:pPr>
                       <a:r>
@@ -6395,7 +6342,7 @@
                       </a:endParaRPr>
                     </a:p>
                   </a:txBody>
-                  <a:tcPr marL="91440" marR="91440" marT="45720" marB="45720" anchor="ctr">
+                  <a:tcPr anchor="ctr">
                     <a:lnL w="9525" cap="flat" cmpd="sng" algn="ctr">
                       <a:solidFill>
                         <a:srgbClr val="C8D0DA"/>
@@ -6439,7 +6386,7 @@
                     <a:bodyPr/>
                     <a:lstStyle/>
                     <a:p>
-                      <a:pPr algn="ctr" indent="0" marL="0">
+                      <a:pPr marL="0" indent="0" algn="ctr">
                         <a:buNone/>
                       </a:pPr>
                       <a:r>
@@ -6460,7 +6407,7 @@
                       </a:endParaRPr>
                     </a:p>
                   </a:txBody>
-                  <a:tcPr marL="91440" marR="91440" marT="45720" marB="45720" anchor="ctr">
+                  <a:tcPr anchor="ctr">
                     <a:lnL w="9525" cap="flat" cmpd="sng" algn="ctr">
                       <a:solidFill>
                         <a:srgbClr val="C8D0DA"/>
@@ -6499,6 +6446,11 @@
                     </a:lnB>
                   </a:tcPr>
                 </a:tc>
+                <a:extLst>
+                  <a:ext uri="{0D108BD9-81ED-4DB2-BD59-A6C34878D82A}">
+                    <a16:rowId xmlns:a16="http://schemas.microsoft.com/office/drawing/2014/main" val="10003"/>
+                  </a:ext>
+                </a:extLst>
               </a:tr>
               <a:tr h="329184">
                 <a:tc>
@@ -6506,7 +6458,7 @@
                     <a:bodyPr/>
                     <a:lstStyle/>
                     <a:p>
-                      <a:pPr algn="l" indent="0" marL="0">
+                      <a:pPr marL="0" indent="0" algn="l">
                         <a:buNone/>
                       </a:pPr>
                       <a:r>
@@ -6527,7 +6479,7 @@
                       </a:endParaRPr>
                     </a:p>
                   </a:txBody>
-                  <a:tcPr marL="91440" marR="91440" marT="45720" marB="45720" anchor="ctr">
+                  <a:tcPr anchor="ctr">
                     <a:lnL w="9525" cap="flat" cmpd="sng" algn="ctr">
                       <a:solidFill>
                         <a:srgbClr val="C8D0DA"/>
@@ -6571,7 +6523,7 @@
                     <a:bodyPr/>
                     <a:lstStyle/>
                     <a:p>
-                      <a:pPr algn="l" indent="0" marL="0">
+                      <a:pPr marL="0" indent="0" algn="l">
                         <a:buNone/>
                       </a:pPr>
                       <a:r>
@@ -6592,7 +6544,7 @@
                       </a:endParaRPr>
                     </a:p>
                   </a:txBody>
-                  <a:tcPr marL="91440" marR="91440" marT="45720" marB="45720" anchor="ctr">
+                  <a:tcPr anchor="ctr">
                     <a:lnL w="9525" cap="flat" cmpd="sng" algn="ctr">
                       <a:solidFill>
                         <a:srgbClr val="C8D0DA"/>
@@ -6636,7 +6588,7 @@
                     <a:bodyPr/>
                     <a:lstStyle/>
                     <a:p>
-                      <a:pPr algn="l" indent="0" marL="0">
+                      <a:pPr marL="0" indent="0" algn="l">
                         <a:buNone/>
                       </a:pPr>
                       <a:r>
@@ -6657,7 +6609,7 @@
                       </a:endParaRPr>
                     </a:p>
                   </a:txBody>
-                  <a:tcPr marL="91440" marR="91440" marT="45720" marB="45720" anchor="ctr">
+                  <a:tcPr anchor="ctr">
                     <a:lnL w="9525" cap="flat" cmpd="sng" algn="ctr">
                       <a:solidFill>
                         <a:srgbClr val="C8D0DA"/>
@@ -6701,7 +6653,7 @@
                     <a:bodyPr/>
                     <a:lstStyle/>
                     <a:p>
-                      <a:pPr algn="l" indent="0" marL="0">
+                      <a:pPr marL="0" indent="0" algn="l">
                         <a:buNone/>
                       </a:pPr>
                       <a:r>
@@ -6722,7 +6674,7 @@
                       </a:endParaRPr>
                     </a:p>
                   </a:txBody>
-                  <a:tcPr marL="91440" marR="91440" marT="45720" marB="45720" anchor="ctr">
+                  <a:tcPr anchor="ctr">
                     <a:lnL w="9525" cap="flat" cmpd="sng" algn="ctr">
                       <a:solidFill>
                         <a:srgbClr val="C8D0DA"/>
@@ -6766,7 +6718,7 @@
                     <a:bodyPr/>
                     <a:lstStyle/>
                     <a:p>
-                      <a:pPr algn="ctr" indent="0" marL="0">
+                      <a:pPr marL="0" indent="0" algn="ctr">
                         <a:buNone/>
                       </a:pPr>
                       <a:r>
@@ -6787,7 +6739,7 @@
                       </a:endParaRPr>
                     </a:p>
                   </a:txBody>
-                  <a:tcPr marL="91440" marR="91440" marT="45720" marB="45720" anchor="ctr">
+                  <a:tcPr anchor="ctr">
                     <a:lnL w="9525" cap="flat" cmpd="sng" algn="ctr">
                       <a:solidFill>
                         <a:srgbClr val="C8D0DA"/>
@@ -6831,7 +6783,7 @@
                     <a:bodyPr/>
                     <a:lstStyle/>
                     <a:p>
-                      <a:pPr algn="ctr" indent="0" marL="0">
+                      <a:pPr marL="0" indent="0" algn="ctr">
                         <a:buNone/>
                       </a:pPr>
                       <a:r>
@@ -6852,7 +6804,7 @@
                       </a:endParaRPr>
                     </a:p>
                   </a:txBody>
-                  <a:tcPr marL="91440" marR="91440" marT="45720" marB="45720" anchor="ctr">
+                  <a:tcPr anchor="ctr">
                     <a:lnL w="9525" cap="flat" cmpd="sng" algn="ctr">
                       <a:solidFill>
                         <a:srgbClr val="C8D0DA"/>
@@ -6891,6 +6843,11 @@
                     </a:lnB>
                   </a:tcPr>
                 </a:tc>
+                <a:extLst>
+                  <a:ext uri="{0D108BD9-81ED-4DB2-BD59-A6C34878D82A}">
+                    <a16:rowId xmlns:a16="http://schemas.microsoft.com/office/drawing/2014/main" val="10004"/>
+                  </a:ext>
+                </a:extLst>
               </a:tr>
               <a:tr h="329184">
                 <a:tc>
@@ -6898,7 +6855,7 @@
                     <a:bodyPr/>
                     <a:lstStyle/>
                     <a:p>
-                      <a:pPr algn="l" indent="0" marL="0">
+                      <a:pPr marL="0" indent="0" algn="l">
                         <a:buNone/>
                       </a:pPr>
                       <a:r>
@@ -6919,7 +6876,7 @@
                       </a:endParaRPr>
                     </a:p>
                   </a:txBody>
-                  <a:tcPr marL="91440" marR="91440" marT="45720" marB="45720" anchor="ctr">
+                  <a:tcPr anchor="ctr">
                     <a:lnL w="9525" cap="flat" cmpd="sng" algn="ctr">
                       <a:solidFill>
                         <a:srgbClr val="C8D0DA"/>
@@ -6963,7 +6920,7 @@
                     <a:bodyPr/>
                     <a:lstStyle/>
                     <a:p>
-                      <a:pPr algn="l" indent="0" marL="0">
+                      <a:pPr marL="0" indent="0" algn="l">
                         <a:buNone/>
                       </a:pPr>
                       <a:r>
@@ -6984,7 +6941,7 @@
                       </a:endParaRPr>
                     </a:p>
                   </a:txBody>
-                  <a:tcPr marL="91440" marR="91440" marT="45720" marB="45720" anchor="ctr">
+                  <a:tcPr anchor="ctr">
                     <a:lnL w="9525" cap="flat" cmpd="sng" algn="ctr">
                       <a:solidFill>
                         <a:srgbClr val="C8D0DA"/>
@@ -7028,7 +6985,7 @@
                     <a:bodyPr/>
                     <a:lstStyle/>
                     <a:p>
-                      <a:pPr algn="l" indent="0" marL="0">
+                      <a:pPr marL="0" indent="0" algn="l">
                         <a:buNone/>
                       </a:pPr>
                       <a:r>
@@ -7049,7 +7006,7 @@
                       </a:endParaRPr>
                     </a:p>
                   </a:txBody>
-                  <a:tcPr marL="91440" marR="91440" marT="45720" marB="45720" anchor="ctr">
+                  <a:tcPr anchor="ctr">
                     <a:lnL w="9525" cap="flat" cmpd="sng" algn="ctr">
                       <a:solidFill>
                         <a:srgbClr val="C8D0DA"/>
@@ -7093,7 +7050,7 @@
                     <a:bodyPr/>
                     <a:lstStyle/>
                     <a:p>
-                      <a:pPr algn="l" indent="0" marL="0">
+                      <a:pPr marL="0" indent="0" algn="l">
                         <a:buNone/>
                       </a:pPr>
                       <a:r>
@@ -7114,7 +7071,7 @@
                       </a:endParaRPr>
                     </a:p>
                   </a:txBody>
-                  <a:tcPr marL="91440" marR="91440" marT="45720" marB="45720" anchor="ctr">
+                  <a:tcPr anchor="ctr">
                     <a:lnL w="9525" cap="flat" cmpd="sng" algn="ctr">
                       <a:solidFill>
                         <a:srgbClr val="C8D0DA"/>
@@ -7158,7 +7115,7 @@
                     <a:bodyPr/>
                     <a:lstStyle/>
                     <a:p>
-                      <a:pPr algn="ctr" indent="0" marL="0">
+                      <a:pPr marL="0" indent="0" algn="ctr">
                         <a:buNone/>
                       </a:pPr>
                       <a:r>
@@ -7179,7 +7136,7 @@
                       </a:endParaRPr>
                     </a:p>
                   </a:txBody>
-                  <a:tcPr marL="91440" marR="91440" marT="45720" marB="45720" anchor="ctr">
+                  <a:tcPr anchor="ctr">
                     <a:lnL w="9525" cap="flat" cmpd="sng" algn="ctr">
                       <a:solidFill>
                         <a:srgbClr val="C8D0DA"/>
@@ -7223,7 +7180,7 @@
                     <a:bodyPr/>
                     <a:lstStyle/>
                     <a:p>
-                      <a:pPr algn="ctr" indent="0" marL="0">
+                      <a:pPr marL="0" indent="0" algn="ctr">
                         <a:buNone/>
                       </a:pPr>
                       <a:r>
@@ -7244,7 +7201,7 @@
                       </a:endParaRPr>
                     </a:p>
                   </a:txBody>
-                  <a:tcPr marL="91440" marR="91440" marT="45720" marB="45720" anchor="ctr">
+                  <a:tcPr anchor="ctr">
                     <a:lnL w="9525" cap="flat" cmpd="sng" algn="ctr">
                       <a:solidFill>
                         <a:srgbClr val="C8D0DA"/>
@@ -7283,6 +7240,11 @@
                     </a:lnB>
                   </a:tcPr>
                 </a:tc>
+                <a:extLst>
+                  <a:ext uri="{0D108BD9-81ED-4DB2-BD59-A6C34878D82A}">
+                    <a16:rowId xmlns:a16="http://schemas.microsoft.com/office/drawing/2014/main" val="10005"/>
+                  </a:ext>
+                </a:extLst>
               </a:tr>
               <a:tr h="329184">
                 <a:tc>
@@ -7290,7 +7252,7 @@
                     <a:bodyPr/>
                     <a:lstStyle/>
                     <a:p>
-                      <a:pPr algn="l" indent="0" marL="0">
+                      <a:pPr marL="0" indent="0" algn="l">
                         <a:buNone/>
                       </a:pPr>
                       <a:r>
@@ -7311,7 +7273,7 @@
                       </a:endParaRPr>
                     </a:p>
                   </a:txBody>
-                  <a:tcPr marL="91440" marR="91440" marT="45720" marB="45720" anchor="ctr">
+                  <a:tcPr anchor="ctr">
                     <a:lnL w="9525" cap="flat" cmpd="sng" algn="ctr">
                       <a:solidFill>
                         <a:srgbClr val="C8D0DA"/>
@@ -7358,7 +7320,7 @@
                     <a:bodyPr/>
                     <a:lstStyle/>
                     <a:p>
-                      <a:pPr algn="l" indent="0" marL="0">
+                      <a:pPr marL="0" indent="0" algn="l">
                         <a:buNone/>
                       </a:pPr>
                       <a:r>
@@ -7379,7 +7341,7 @@
                       </a:endParaRPr>
                     </a:p>
                   </a:txBody>
-                  <a:tcPr marL="91440" marR="91440" marT="45720" marB="45720" anchor="ctr">
+                  <a:tcPr anchor="ctr">
                     <a:lnL w="9525" cap="flat" cmpd="sng" algn="ctr">
                       <a:solidFill>
                         <a:srgbClr val="C8D0DA"/>
@@ -7426,7 +7388,7 @@
                     <a:bodyPr/>
                     <a:lstStyle/>
                     <a:p>
-                      <a:pPr algn="l" indent="0" marL="0">
+                      <a:pPr marL="0" indent="0" algn="l">
                         <a:buNone/>
                       </a:pPr>
                       <a:r>
@@ -7447,7 +7409,7 @@
                       </a:endParaRPr>
                     </a:p>
                   </a:txBody>
-                  <a:tcPr marL="91440" marR="91440" marT="45720" marB="45720" anchor="ctr">
+                  <a:tcPr anchor="ctr">
                     <a:lnL w="9525" cap="flat" cmpd="sng" algn="ctr">
                       <a:solidFill>
                         <a:srgbClr val="C8D0DA"/>
@@ -7494,7 +7456,7 @@
                     <a:bodyPr/>
                     <a:lstStyle/>
                     <a:p>
-                      <a:pPr algn="l" indent="0" marL="0">
+                      <a:pPr marL="0" indent="0" algn="l">
                         <a:buNone/>
                       </a:pPr>
                       <a:r>
@@ -7515,7 +7477,7 @@
                       </a:endParaRPr>
                     </a:p>
                   </a:txBody>
-                  <a:tcPr marL="91440" marR="91440" marT="45720" marB="45720" anchor="ctr">
+                  <a:tcPr anchor="ctr">
                     <a:lnL w="9525" cap="flat" cmpd="sng" algn="ctr">
                       <a:solidFill>
                         <a:srgbClr val="C8D0DA"/>
@@ -7562,7 +7524,7 @@
                     <a:bodyPr/>
                     <a:lstStyle/>
                     <a:p>
-                      <a:pPr algn="ctr" indent="0" marL="0">
+                      <a:pPr marL="0" indent="0" algn="ctr">
                         <a:buNone/>
                       </a:pPr>
                       <a:r>
@@ -7583,7 +7545,7 @@
                       </a:endParaRPr>
                     </a:p>
                   </a:txBody>
-                  <a:tcPr marL="91440" marR="91440" marT="45720" marB="45720" anchor="ctr">
+                  <a:tcPr anchor="ctr">
                     <a:lnL w="9525" cap="flat" cmpd="sng" algn="ctr">
                       <a:solidFill>
                         <a:srgbClr val="C8D0DA"/>
@@ -7630,7 +7592,7 @@
                     <a:bodyPr/>
                     <a:lstStyle/>
                     <a:p>
-                      <a:pPr algn="ctr" indent="0" marL="0">
+                      <a:pPr marL="0" indent="0" algn="ctr">
                         <a:buNone/>
                       </a:pPr>
                       <a:r>
@@ -7651,7 +7613,7 @@
                       </a:endParaRPr>
                     </a:p>
                   </a:txBody>
-                  <a:tcPr marL="91440" marR="91440" marT="45720" marB="45720" anchor="ctr">
+                  <a:tcPr anchor="ctr">
                     <a:lnL w="9525" cap="flat" cmpd="sng" algn="ctr">
                       <a:solidFill>
                         <a:srgbClr val="C8D0DA"/>
@@ -7693,6 +7655,11 @@
                     </a:solidFill>
                   </a:tcPr>
                 </a:tc>
+                <a:extLst>
+                  <a:ext uri="{0D108BD9-81ED-4DB2-BD59-A6C34878D82A}">
+                    <a16:rowId xmlns:a16="http://schemas.microsoft.com/office/drawing/2014/main" val="10006"/>
+                  </a:ext>
+                </a:extLst>
               </a:tr>
             </a:tbl>
           </a:graphicData>
@@ -7722,6 +7689,13 @@
             <a:prstDash val="solid"/>
           </a:ln>
         </p:spPr>
+        <p:txBody>
+          <a:bodyPr/>
+          <a:lstStyle/>
+          <a:p>
+            <a:endParaRPr lang="es-GT"/>
+          </a:p>
+        </p:txBody>
       </p:sp>
       <p:sp>
         <p:nvSpPr>
@@ -7744,7 +7718,7 @@
           <a:bodyPr wrap="square" rtlCol="0" anchor="ctr"/>
           <a:lstStyle/>
           <a:p>
-            <a:pPr indent="0" marL="0">
+            <a:pPr marL="0" indent="0">
               <a:buNone/>
             </a:pPr>
             <a:r>
@@ -7758,9 +7732,6 @@
               </a:rPr>
               <a:t>La fila resaltada es el hallazgo del proyecto.  </a:t>
             </a:r>
-            <a:pPr indent="0" marL="0">
-              <a:buNone/>
-            </a:pPr>
             <a:r>
               <a:rPr lang="en-US" sz="1050" dirty="0">
                 <a:solidFill>
@@ -7772,9 +7743,6 @@
               </a:rPr>
               <a:t>El envenenamiento de posicionamiento no aparece en el OWASP Top 10 ni existe conjunto de reglas publico que lo cubra: OWASP clasifica la </a:t>
             </a:r>
-            <a:pPr indent="0" marL="0">
-              <a:buNone/>
-            </a:pPr>
             <a:r>
               <a:rPr lang="en-US" sz="1050" i="1" dirty="0">
                 <a:solidFill>
@@ -7786,9 +7754,6 @@
               </a:rPr>
               <a:t>via de entrada</a:t>
             </a:r>
-            <a:pPr indent="0" marL="0">
-              <a:buNone/>
-            </a:pPr>
             <a:r>
               <a:rPr lang="en-US" sz="1050" dirty="0">
                 <a:solidFill>
@@ -7800,9 +7765,6 @@
               </a:rPr>
               <a:t> del ataque, no el </a:t>
             </a:r>
-            <a:pPr indent="0" marL="0">
-              <a:buNone/>
-            </a:pPr>
             <a:r>
               <a:rPr lang="en-US" sz="1050" i="1" dirty="0">
                 <a:solidFill>
@@ -7814,9 +7776,6 @@
               </a:rPr>
               <a:t>objetivo</a:t>
             </a:r>
-            <a:pPr indent="0" marL="0">
-              <a:buNone/>
-            </a:pPr>
             <a:r>
               <a:rPr lang="en-US" sz="1050" dirty="0">
                 <a:solidFill>
@@ -7853,7 +7812,7 @@
           <a:bodyPr wrap="square" rtlCol="0" anchor="ctr"/>
           <a:lstStyle/>
           <a:p>
-            <a:pPr indent="0" marL="0">
+            <a:pPr marL="0" indent="0">
               <a:buNone/>
             </a:pPr>
             <a:r>
@@ -7892,7 +7851,7 @@
           <a:bodyPr wrap="square" rtlCol="0" anchor="ctr"/>
           <a:lstStyle/>
           <a:p>
-            <a:pPr algn="r" indent="0" marL="0">
+            <a:pPr marL="0" indent="0" algn="r">
               <a:buNone/>
             </a:pPr>
             <a:r>
@@ -7931,7 +7890,7 @@
           <a:bodyPr wrap="square" rtlCol="0" anchor="ctr"/>
           <a:lstStyle/>
           <a:p>
-            <a:pPr indent="0" marL="0">
+            <a:pPr marL="0" indent="0">
               <a:buNone/>
             </a:pPr>
             <a:r>
@@ -7993,6 +7952,13 @@
           </a:solidFill>
           <a:ln/>
         </p:spPr>
+        <p:txBody>
+          <a:bodyPr/>
+          <a:lstStyle/>
+          <a:p>
+            <a:endParaRPr lang="es-GT"/>
+          </a:p>
+        </p:txBody>
       </p:sp>
       <p:sp>
         <p:nvSpPr>
@@ -8013,6 +7979,13 @@
           </a:solidFill>
           <a:ln/>
         </p:spPr>
+        <p:txBody>
+          <a:bodyPr/>
+          <a:lstStyle/>
+          <a:p>
+            <a:endParaRPr lang="es-GT"/>
+          </a:p>
+        </p:txBody>
       </p:sp>
       <p:sp>
         <p:nvSpPr>
@@ -8035,7 +8008,7 @@
           <a:bodyPr wrap="square" rtlCol="0" anchor="ctr"/>
           <a:lstStyle/>
           <a:p>
-            <a:pPr algn="ctr" indent="0" marL="0">
+            <a:pPr marL="0" indent="0" algn="ctr">
               <a:buNone/>
             </a:pPr>
             <a:r>
@@ -8074,7 +8047,7 @@
           <a:bodyPr wrap="square" rtlCol="0" anchor="ctr"/>
           <a:lstStyle/>
           <a:p>
-            <a:pPr indent="0" marL="0">
+            <a:pPr marL="0" indent="0">
               <a:buNone/>
             </a:pPr>
             <a:r>
@@ -8113,7 +8086,7 @@
           <a:bodyPr wrap="square" rtlCol="0" anchor="ctr"/>
           <a:lstStyle/>
           <a:p>
-            <a:pPr indent="0" marL="0">
+            <a:pPr marL="0" indent="0">
               <a:buNone/>
             </a:pPr>
             <a:r>
@@ -8150,6 +8123,13 @@
           </a:solidFill>
           <a:ln/>
         </p:spPr>
+        <p:txBody>
+          <a:bodyPr/>
+          <a:lstStyle/>
+          <a:p>
+            <a:endParaRPr lang="es-GT"/>
+          </a:p>
+        </p:txBody>
       </p:sp>
       <p:sp>
         <p:nvSpPr>
@@ -8172,11 +8152,11 @@
           <a:bodyPr wrap="square" rtlCol="0" anchor="ctr"/>
           <a:lstStyle/>
           <a:p>
-            <a:pPr indent="0" marL="0">
+            <a:pPr marL="0" indent="0">
               <a:buNone/>
             </a:pPr>
             <a:r>
-              <a:rPr lang="en-US" sz="1100" b="1" spc="60" kern="0" dirty="0">
+              <a:rPr lang="en-US" sz="1100" b="1" kern="0" spc="60" dirty="0">
                 <a:solidFill>
                   <a:srgbClr val="FFFFFF"/>
                 </a:solidFill>
@@ -8192,7 +8172,7 @@
       </p:sp>
       <p:graphicFrame>
         <p:nvGraphicFramePr>
-          <p:cNvPr id="6" name="Table 0"/>
+          <p:cNvPr id="9" name="Table 0"/>
           <p:cNvGraphicFramePr>
             <a:graphicFrameLocks noGrp="1"/>
           </p:cNvGraphicFramePr>
@@ -8206,15 +8186,27 @@
         </p:nvGraphicFramePr>
         <p:xfrm>
           <a:off x="384048" y="1444752"/>
-          <a:ext cx="3950208" cy="914400"/>
+          <a:ext cx="3950208" cy="1618488"/>
         </p:xfrm>
         <a:graphic>
           <a:graphicData uri="http://schemas.openxmlformats.org/drawingml/2006/table">
             <a:tbl>
               <a:tblPr/>
               <a:tblGrid>
-                <a:gridCol w="1298448"/>
-                <a:gridCol w="2651760"/>
+                <a:gridCol w="1298448">
+                  <a:extLst>
+                    <a:ext uri="{9D8B030D-6E8A-4147-A177-3AD203B41FA5}">
+                      <a16:colId xmlns:a16="http://schemas.microsoft.com/office/drawing/2014/main" val="20000"/>
+                    </a:ext>
+                  </a:extLst>
+                </a:gridCol>
+                <a:gridCol w="2651760">
+                  <a:extLst>
+                    <a:ext uri="{9D8B030D-6E8A-4147-A177-3AD203B41FA5}">
+                      <a16:colId xmlns:a16="http://schemas.microsoft.com/office/drawing/2014/main" val="20001"/>
+                    </a:ext>
+                  </a:extLst>
+                </a:gridCol>
               </a:tblGrid>
               <a:tr h="269748">
                 <a:tc>
@@ -8222,7 +8214,7 @@
                     <a:bodyPr/>
                     <a:lstStyle/>
                     <a:p>
-                      <a:pPr algn="l" indent="0" marL="0">
+                      <a:pPr marL="0" indent="0" algn="l">
                         <a:buNone/>
                       </a:pPr>
                       <a:r>
@@ -8243,7 +8235,7 @@
                       </a:endParaRPr>
                     </a:p>
                   </a:txBody>
-                  <a:tcPr marL="91440" marR="91440" marT="45720" marB="45720" anchor="ctr">
+                  <a:tcPr anchor="ctr">
                     <a:lnL w="9525" cap="flat" cmpd="sng" algn="ctr">
                       <a:solidFill>
                         <a:srgbClr val="C8D0DA"/>
@@ -8290,7 +8282,7 @@
                     <a:bodyPr/>
                     <a:lstStyle/>
                     <a:p>
-                      <a:pPr algn="l" indent="0" marL="0">
+                      <a:pPr marL="0" indent="0" algn="l">
                         <a:buNone/>
                       </a:pPr>
                       <a:r>
@@ -8311,7 +8303,7 @@
                       </a:endParaRPr>
                     </a:p>
                   </a:txBody>
-                  <a:tcPr marL="91440" marR="91440" marT="45720" marB="45720" anchor="ctr">
+                  <a:tcPr anchor="ctr">
                     <a:lnL w="9525" cap="flat" cmpd="sng" algn="ctr">
                       <a:solidFill>
                         <a:srgbClr val="C8D0DA"/>
@@ -8353,6 +8345,11 @@
                     </a:solidFill>
                   </a:tcPr>
                 </a:tc>
+                <a:extLst>
+                  <a:ext uri="{0D108BD9-81ED-4DB2-BD59-A6C34878D82A}">
+                    <a16:rowId xmlns:a16="http://schemas.microsoft.com/office/drawing/2014/main" val="10000"/>
+                  </a:ext>
+                </a:extLst>
               </a:tr>
               <a:tr h="269748">
                 <a:tc>
@@ -8360,7 +8357,7 @@
                     <a:bodyPr/>
                     <a:lstStyle/>
                     <a:p>
-                      <a:pPr algn="l" indent="0" marL="0">
+                      <a:pPr marL="0" indent="0" algn="l">
                         <a:buNone/>
                       </a:pPr>
                       <a:r>
@@ -8381,7 +8378,7 @@
                       </a:endParaRPr>
                     </a:p>
                   </a:txBody>
-                  <a:tcPr marL="91440" marR="91440" marT="45720" marB="45720" anchor="ctr">
+                  <a:tcPr anchor="ctr">
                     <a:lnL w="9525" cap="flat" cmpd="sng" algn="ctr">
                       <a:solidFill>
                         <a:srgbClr val="C8D0DA"/>
@@ -8428,7 +8425,7 @@
                     <a:bodyPr/>
                     <a:lstStyle/>
                     <a:p>
-                      <a:pPr algn="l" indent="0" marL="0">
+                      <a:pPr marL="0" indent="0" algn="l">
                         <a:buNone/>
                       </a:pPr>
                       <a:r>
@@ -8449,7 +8446,7 @@
                       </a:endParaRPr>
                     </a:p>
                   </a:txBody>
-                  <a:tcPr marL="91440" marR="91440" marT="45720" marB="45720" anchor="ctr">
+                  <a:tcPr anchor="ctr">
                     <a:lnL w="9525" cap="flat" cmpd="sng" algn="ctr">
                       <a:solidFill>
                         <a:srgbClr val="C8D0DA"/>
@@ -8491,6 +8488,11 @@
                     </a:solidFill>
                   </a:tcPr>
                 </a:tc>
+                <a:extLst>
+                  <a:ext uri="{0D108BD9-81ED-4DB2-BD59-A6C34878D82A}">
+                    <a16:rowId xmlns:a16="http://schemas.microsoft.com/office/drawing/2014/main" val="10001"/>
+                  </a:ext>
+                </a:extLst>
               </a:tr>
               <a:tr h="269748">
                 <a:tc>
@@ -8498,7 +8500,7 @@
                     <a:bodyPr/>
                     <a:lstStyle/>
                     <a:p>
-                      <a:pPr algn="l" indent="0" marL="0">
+                      <a:pPr marL="0" indent="0" algn="l">
                         <a:buNone/>
                       </a:pPr>
                       <a:r>
@@ -8519,7 +8521,7 @@
                       </a:endParaRPr>
                     </a:p>
                   </a:txBody>
-                  <a:tcPr marL="91440" marR="91440" marT="45720" marB="45720" anchor="ctr">
+                  <a:tcPr anchor="ctr">
                     <a:lnL w="9525" cap="flat" cmpd="sng" algn="ctr">
                       <a:solidFill>
                         <a:srgbClr val="C8D0DA"/>
@@ -8566,7 +8568,7 @@
                     <a:bodyPr/>
                     <a:lstStyle/>
                     <a:p>
-                      <a:pPr algn="l" indent="0" marL="0">
+                      <a:pPr marL="0" indent="0" algn="l">
                         <a:buNone/>
                       </a:pPr>
                       <a:r>
@@ -8587,7 +8589,7 @@
                       </a:endParaRPr>
                     </a:p>
                   </a:txBody>
-                  <a:tcPr marL="91440" marR="91440" marT="45720" marB="45720" anchor="ctr">
+                  <a:tcPr anchor="ctr">
                     <a:lnL w="9525" cap="flat" cmpd="sng" algn="ctr">
                       <a:solidFill>
                         <a:srgbClr val="C8D0DA"/>
@@ -8629,6 +8631,11 @@
                     </a:solidFill>
                   </a:tcPr>
                 </a:tc>
+                <a:extLst>
+                  <a:ext uri="{0D108BD9-81ED-4DB2-BD59-A6C34878D82A}">
+                    <a16:rowId xmlns:a16="http://schemas.microsoft.com/office/drawing/2014/main" val="10002"/>
+                  </a:ext>
+                </a:extLst>
               </a:tr>
               <a:tr h="269748">
                 <a:tc>
@@ -8636,7 +8643,7 @@
                     <a:bodyPr/>
                     <a:lstStyle/>
                     <a:p>
-                      <a:pPr algn="l" indent="0" marL="0">
+                      <a:pPr marL="0" indent="0" algn="l">
                         <a:buNone/>
                       </a:pPr>
                       <a:r>
@@ -8657,7 +8664,7 @@
                       </a:endParaRPr>
                     </a:p>
                   </a:txBody>
-                  <a:tcPr marL="91440" marR="91440" marT="45720" marB="45720" anchor="ctr">
+                  <a:tcPr anchor="ctr">
                     <a:lnL w="9525" cap="flat" cmpd="sng" algn="ctr">
                       <a:solidFill>
                         <a:srgbClr val="C8D0DA"/>
@@ -8704,7 +8711,7 @@
                     <a:bodyPr/>
                     <a:lstStyle/>
                     <a:p>
-                      <a:pPr algn="l" indent="0" marL="0">
+                      <a:pPr marL="0" indent="0" algn="l">
                         <a:buNone/>
                       </a:pPr>
                       <a:r>
@@ -8725,7 +8732,7 @@
                       </a:endParaRPr>
                     </a:p>
                   </a:txBody>
-                  <a:tcPr marL="91440" marR="91440" marT="45720" marB="45720" anchor="ctr">
+                  <a:tcPr anchor="ctr">
                     <a:lnL w="9525" cap="flat" cmpd="sng" algn="ctr">
                       <a:solidFill>
                         <a:srgbClr val="C8D0DA"/>
@@ -8767,6 +8774,11 @@
                     </a:solidFill>
                   </a:tcPr>
                 </a:tc>
+                <a:extLst>
+                  <a:ext uri="{0D108BD9-81ED-4DB2-BD59-A6C34878D82A}">
+                    <a16:rowId xmlns:a16="http://schemas.microsoft.com/office/drawing/2014/main" val="10003"/>
+                  </a:ext>
+                </a:extLst>
               </a:tr>
               <a:tr h="269748">
                 <a:tc>
@@ -8774,7 +8786,7 @@
                     <a:bodyPr/>
                     <a:lstStyle/>
                     <a:p>
-                      <a:pPr algn="l" indent="0" marL="0">
+                      <a:pPr marL="0" indent="0" algn="l">
                         <a:buNone/>
                       </a:pPr>
                       <a:r>
@@ -8795,7 +8807,7 @@
                       </a:endParaRPr>
                     </a:p>
                   </a:txBody>
-                  <a:tcPr marL="91440" marR="91440" marT="45720" marB="45720" anchor="ctr">
+                  <a:tcPr anchor="ctr">
                     <a:lnL w="9525" cap="flat" cmpd="sng" algn="ctr">
                       <a:solidFill>
                         <a:srgbClr val="C8D0DA"/>
@@ -8842,7 +8854,7 @@
                     <a:bodyPr/>
                     <a:lstStyle/>
                     <a:p>
-                      <a:pPr algn="l" indent="0" marL="0">
+                      <a:pPr marL="0" indent="0" algn="l">
                         <a:buNone/>
                       </a:pPr>
                       <a:r>
@@ -8863,7 +8875,7 @@
                       </a:endParaRPr>
                     </a:p>
                   </a:txBody>
-                  <a:tcPr marL="91440" marR="91440" marT="45720" marB="45720" anchor="ctr">
+                  <a:tcPr anchor="ctr">
                     <a:lnL w="9525" cap="flat" cmpd="sng" algn="ctr">
                       <a:solidFill>
                         <a:srgbClr val="C8D0DA"/>
@@ -8905,6 +8917,11 @@
                     </a:solidFill>
                   </a:tcPr>
                 </a:tc>
+                <a:extLst>
+                  <a:ext uri="{0D108BD9-81ED-4DB2-BD59-A6C34878D82A}">
+                    <a16:rowId xmlns:a16="http://schemas.microsoft.com/office/drawing/2014/main" val="10004"/>
+                  </a:ext>
+                </a:extLst>
               </a:tr>
               <a:tr h="269748">
                 <a:tc>
@@ -8912,7 +8929,7 @@
                     <a:bodyPr/>
                     <a:lstStyle/>
                     <a:p>
-                      <a:pPr algn="l" indent="0" marL="0">
+                      <a:pPr marL="0" indent="0" algn="l">
                         <a:buNone/>
                       </a:pPr>
                       <a:r>
@@ -8933,7 +8950,7 @@
                       </a:endParaRPr>
                     </a:p>
                   </a:txBody>
-                  <a:tcPr marL="91440" marR="91440" marT="45720" marB="45720" anchor="ctr">
+                  <a:tcPr anchor="ctr">
                     <a:lnL w="9525" cap="flat" cmpd="sng" algn="ctr">
                       <a:solidFill>
                         <a:srgbClr val="C8D0DA"/>
@@ -8980,7 +8997,7 @@
                     <a:bodyPr/>
                     <a:lstStyle/>
                     <a:p>
-                      <a:pPr algn="l" indent="0" marL="0">
+                      <a:pPr marL="0" indent="0" algn="l">
                         <a:buNone/>
                       </a:pPr>
                       <a:r>
@@ -9001,7 +9018,7 @@
                       </a:endParaRPr>
                     </a:p>
                   </a:txBody>
-                  <a:tcPr marL="91440" marR="91440" marT="45720" marB="45720" anchor="ctr">
+                  <a:tcPr anchor="ctr">
                     <a:lnL w="9525" cap="flat" cmpd="sng" algn="ctr">
                       <a:solidFill>
                         <a:srgbClr val="C8D0DA"/>
@@ -9043,6 +9060,11 @@
                     </a:solidFill>
                   </a:tcPr>
                 </a:tc>
+                <a:extLst>
+                  <a:ext uri="{0D108BD9-81ED-4DB2-BD59-A6C34878D82A}">
+                    <a16:rowId xmlns:a16="http://schemas.microsoft.com/office/drawing/2014/main" val="10005"/>
+                  </a:ext>
+                </a:extLst>
               </a:tr>
             </a:tbl>
           </a:graphicData>
@@ -9069,7 +9091,7 @@
           <a:bodyPr wrap="square" rtlCol="0" anchor="t"/>
           <a:lstStyle/>
           <a:p>
-            <a:pPr indent="0" marL="0">
+            <a:pPr marL="0" indent="0">
               <a:buNone/>
             </a:pPr>
             <a:r>
@@ -9083,9 +9105,6 @@
               </a:rPr>
               <a:t>La red entre el cortafuegos y la aplicacion se declara interna: </a:t>
             </a:r>
-            <a:pPr indent="0" marL="0">
-              <a:buNone/>
-            </a:pPr>
             <a:r>
               <a:rPr lang="en-US" sz="1000" dirty="0">
                 <a:solidFill>
@@ -9120,6 +9139,13 @@
           </a:solidFill>
           <a:ln/>
         </p:spPr>
+        <p:txBody>
+          <a:bodyPr/>
+          <a:lstStyle/>
+          <a:p>
+            <a:endParaRPr lang="es-GT"/>
+          </a:p>
+        </p:txBody>
       </p:sp>
       <p:sp>
         <p:nvSpPr>
@@ -9142,11 +9168,11 @@
           <a:bodyPr wrap="square" rtlCol="0" anchor="ctr"/>
           <a:lstStyle/>
           <a:p>
-            <a:pPr indent="0" marL="0">
+            <a:pPr marL="0" indent="0">
               <a:buNone/>
             </a:pPr>
             <a:r>
-              <a:rPr lang="en-US" sz="1100" b="1" spc="60" kern="0" dirty="0">
+              <a:rPr lang="en-US" sz="1100" b="1" kern="0" spc="60" dirty="0">
                 <a:solidFill>
                   <a:srgbClr val="FFFFFF"/>
                 </a:solidFill>
@@ -9181,7 +9207,7 @@
           <a:bodyPr wrap="square" rtlCol="0" anchor="ctr"/>
           <a:lstStyle/>
           <a:p>
-            <a:pPr indent="0" marL="0">
+            <a:pPr marL="0" indent="0">
               <a:buNone/>
             </a:pPr>
             <a:r>
@@ -9201,7 +9227,7 @@
       </p:sp>
       <p:graphicFrame>
         <p:nvGraphicFramePr>
-          <p:cNvPr id="11" name="Table 1"/>
+          <p:cNvPr id="14" name="Table 1"/>
           <p:cNvGraphicFramePr>
             <a:graphicFrameLocks noGrp="1"/>
           </p:cNvGraphicFramePr>
@@ -9215,16 +9241,34 @@
         </p:nvGraphicFramePr>
         <p:xfrm>
           <a:off x="4553712" y="1682496"/>
-          <a:ext cx="4206240" cy="914400"/>
+          <a:ext cx="4206240" cy="1536192"/>
         </p:xfrm>
         <a:graphic>
           <a:graphicData uri="http://schemas.openxmlformats.org/drawingml/2006/table">
             <a:tbl>
               <a:tblPr/>
               <a:tblGrid>
-                <a:gridCol w="2743200"/>
-                <a:gridCol w="731520"/>
-                <a:gridCol w="731520"/>
+                <a:gridCol w="2743200">
+                  <a:extLst>
+                    <a:ext uri="{9D8B030D-6E8A-4147-A177-3AD203B41FA5}">
+                      <a16:colId xmlns:a16="http://schemas.microsoft.com/office/drawing/2014/main" val="20000"/>
+                    </a:ext>
+                  </a:extLst>
+                </a:gridCol>
+                <a:gridCol w="731520">
+                  <a:extLst>
+                    <a:ext uri="{9D8B030D-6E8A-4147-A177-3AD203B41FA5}">
+                      <a16:colId xmlns:a16="http://schemas.microsoft.com/office/drawing/2014/main" val="20001"/>
+                    </a:ext>
+                  </a:extLst>
+                </a:gridCol>
+                <a:gridCol w="731520">
+                  <a:extLst>
+                    <a:ext uri="{9D8B030D-6E8A-4147-A177-3AD203B41FA5}">
+                      <a16:colId xmlns:a16="http://schemas.microsoft.com/office/drawing/2014/main" val="20002"/>
+                    </a:ext>
+                  </a:extLst>
+                </a:gridCol>
               </a:tblGrid>
               <a:tr h="256032">
                 <a:tc>
@@ -9232,7 +9276,7 @@
                     <a:bodyPr/>
                     <a:lstStyle/>
                     <a:p>
-                      <a:pPr algn="l" indent="0" marL="0">
+                      <a:pPr marL="0" indent="0" algn="l">
                         <a:buNone/>
                       </a:pPr>
                       <a:r>
@@ -9253,7 +9297,7 @@
                       </a:endParaRPr>
                     </a:p>
                   </a:txBody>
-                  <a:tcPr marL="91440" marR="91440" marT="45720" marB="45720" anchor="ctr">
+                  <a:tcPr anchor="ctr">
                     <a:lnL w="9525" cap="flat" cmpd="sng" algn="ctr">
                       <a:solidFill>
                         <a:srgbClr val="C8D0DA"/>
@@ -9300,7 +9344,7 @@
                     <a:bodyPr/>
                     <a:lstStyle/>
                     <a:p>
-                      <a:pPr algn="l" indent="0" marL="0">
+                      <a:pPr marL="0" indent="0" algn="l">
                         <a:buNone/>
                       </a:pPr>
                       <a:r>
@@ -9321,7 +9365,7 @@
                       </a:endParaRPr>
                     </a:p>
                   </a:txBody>
-                  <a:tcPr marL="91440" marR="91440" marT="45720" marB="45720" anchor="ctr">
+                  <a:tcPr anchor="ctr">
                     <a:lnL w="9525" cap="flat" cmpd="sng" algn="ctr">
                       <a:solidFill>
                         <a:srgbClr val="C8D0DA"/>
@@ -9368,7 +9412,7 @@
                     <a:bodyPr/>
                     <a:lstStyle/>
                     <a:p>
-                      <a:pPr algn="l" indent="0" marL="0">
+                      <a:pPr marL="0" indent="0" algn="l">
                         <a:buNone/>
                       </a:pPr>
                       <a:r>
@@ -9389,7 +9433,7 @@
                       </a:endParaRPr>
                     </a:p>
                   </a:txBody>
-                  <a:tcPr marL="91440" marR="91440" marT="45720" marB="45720" anchor="ctr">
+                  <a:tcPr anchor="ctr">
                     <a:lnL w="9525" cap="flat" cmpd="sng" algn="ctr">
                       <a:solidFill>
                         <a:srgbClr val="C8D0DA"/>
@@ -9431,6 +9475,11 @@
                     </a:solidFill>
                   </a:tcPr>
                 </a:tc>
+                <a:extLst>
+                  <a:ext uri="{0D108BD9-81ED-4DB2-BD59-A6C34878D82A}">
+                    <a16:rowId xmlns:a16="http://schemas.microsoft.com/office/drawing/2014/main" val="10000"/>
+                  </a:ext>
+                </a:extLst>
               </a:tr>
               <a:tr h="256032">
                 <a:tc>
@@ -9438,7 +9487,7 @@
                     <a:bodyPr/>
                     <a:lstStyle/>
                     <a:p>
-                      <a:pPr algn="l" indent="0" marL="0">
+                      <a:pPr marL="0" indent="0" algn="l">
                         <a:buNone/>
                       </a:pPr>
                       <a:r>
@@ -9459,7 +9508,7 @@
                       </a:endParaRPr>
                     </a:p>
                   </a:txBody>
-                  <a:tcPr marL="91440" marR="91440" marT="45720" marB="45720" anchor="ctr">
+                  <a:tcPr anchor="ctr">
                     <a:lnL w="9525" cap="flat" cmpd="sng" algn="ctr">
                       <a:solidFill>
                         <a:srgbClr val="C8D0DA"/>
@@ -9503,7 +9552,7 @@
                     <a:bodyPr/>
                     <a:lstStyle/>
                     <a:p>
-                      <a:pPr algn="ctr" indent="0" marL="0">
+                      <a:pPr marL="0" indent="0" algn="ctr">
                         <a:buNone/>
                       </a:pPr>
                       <a:r>
@@ -9524,7 +9573,7 @@
                       </a:endParaRPr>
                     </a:p>
                   </a:txBody>
-                  <a:tcPr marL="91440" marR="91440" marT="45720" marB="45720" anchor="ctr">
+                  <a:tcPr anchor="ctr">
                     <a:lnL w="9525" cap="flat" cmpd="sng" algn="ctr">
                       <a:solidFill>
                         <a:srgbClr val="C8D0DA"/>
@@ -9568,7 +9617,7 @@
                     <a:bodyPr/>
                     <a:lstStyle/>
                     <a:p>
-                      <a:pPr algn="ctr" indent="0" marL="0">
+                      <a:pPr marL="0" indent="0" algn="ctr">
                         <a:buNone/>
                       </a:pPr>
                       <a:r>
@@ -9589,7 +9638,7 @@
                       </a:endParaRPr>
                     </a:p>
                   </a:txBody>
-                  <a:tcPr marL="91440" marR="91440" marT="45720" marB="45720" anchor="ctr">
+                  <a:tcPr anchor="ctr">
                     <a:lnL w="9525" cap="flat" cmpd="sng" algn="ctr">
                       <a:solidFill>
                         <a:srgbClr val="C8D0DA"/>
@@ -9628,6 +9677,11 @@
                     </a:lnB>
                   </a:tcPr>
                 </a:tc>
+                <a:extLst>
+                  <a:ext uri="{0D108BD9-81ED-4DB2-BD59-A6C34878D82A}">
+                    <a16:rowId xmlns:a16="http://schemas.microsoft.com/office/drawing/2014/main" val="10001"/>
+                  </a:ext>
+                </a:extLst>
               </a:tr>
               <a:tr h="256032">
                 <a:tc>
@@ -9635,7 +9689,7 @@
                     <a:bodyPr/>
                     <a:lstStyle/>
                     <a:p>
-                      <a:pPr algn="l" indent="0" marL="0">
+                      <a:pPr marL="0" indent="0" algn="l">
                         <a:buNone/>
                       </a:pPr>
                       <a:r>
@@ -9656,7 +9710,7 @@
                       </a:endParaRPr>
                     </a:p>
                   </a:txBody>
-                  <a:tcPr marL="91440" marR="91440" marT="45720" marB="45720" anchor="ctr">
+                  <a:tcPr anchor="ctr">
                     <a:lnL w="9525" cap="flat" cmpd="sng" algn="ctr">
                       <a:solidFill>
                         <a:srgbClr val="C8D0DA"/>
@@ -9703,7 +9757,7 @@
                     <a:bodyPr/>
                     <a:lstStyle/>
                     <a:p>
-                      <a:pPr algn="ctr" indent="0" marL="0">
+                      <a:pPr marL="0" indent="0" algn="ctr">
                         <a:buNone/>
                       </a:pPr>
                       <a:r>
@@ -9724,7 +9778,7 @@
                       </a:endParaRPr>
                     </a:p>
                   </a:txBody>
-                  <a:tcPr marL="91440" marR="91440" marT="45720" marB="45720" anchor="ctr">
+                  <a:tcPr anchor="ctr">
                     <a:lnL w="9525" cap="flat" cmpd="sng" algn="ctr">
                       <a:solidFill>
                         <a:srgbClr val="C8D0DA"/>
@@ -9771,7 +9825,7 @@
                     <a:bodyPr/>
                     <a:lstStyle/>
                     <a:p>
-                      <a:pPr algn="ctr" indent="0" marL="0">
+                      <a:pPr marL="0" indent="0" algn="ctr">
                         <a:buNone/>
                       </a:pPr>
                       <a:r>
@@ -9792,7 +9846,7 @@
                       </a:endParaRPr>
                     </a:p>
                   </a:txBody>
-                  <a:tcPr marL="91440" marR="91440" marT="45720" marB="45720" anchor="ctr">
+                  <a:tcPr anchor="ctr">
                     <a:lnL w="9525" cap="flat" cmpd="sng" algn="ctr">
                       <a:solidFill>
                         <a:srgbClr val="C8D0DA"/>
@@ -9834,6 +9888,11 @@
                     </a:solidFill>
                   </a:tcPr>
                 </a:tc>
+                <a:extLst>
+                  <a:ext uri="{0D108BD9-81ED-4DB2-BD59-A6C34878D82A}">
+                    <a16:rowId xmlns:a16="http://schemas.microsoft.com/office/drawing/2014/main" val="10002"/>
+                  </a:ext>
+                </a:extLst>
               </a:tr>
               <a:tr h="256032">
                 <a:tc>
@@ -9841,7 +9900,7 @@
                     <a:bodyPr/>
                     <a:lstStyle/>
                     <a:p>
-                      <a:pPr algn="l" indent="0" marL="0">
+                      <a:pPr marL="0" indent="0" algn="l">
                         <a:buNone/>
                       </a:pPr>
                       <a:r>
@@ -9862,7 +9921,7 @@
                       </a:endParaRPr>
                     </a:p>
                   </a:txBody>
-                  <a:tcPr marL="91440" marR="91440" marT="45720" marB="45720" anchor="ctr">
+                  <a:tcPr anchor="ctr">
                     <a:lnL w="9525" cap="flat" cmpd="sng" algn="ctr">
                       <a:solidFill>
                         <a:srgbClr val="C8D0DA"/>
@@ -9909,7 +9968,7 @@
                     <a:bodyPr/>
                     <a:lstStyle/>
                     <a:p>
-                      <a:pPr algn="ctr" indent="0" marL="0">
+                      <a:pPr marL="0" indent="0" algn="ctr">
                         <a:buNone/>
                       </a:pPr>
                       <a:r>
@@ -9930,7 +9989,7 @@
                       </a:endParaRPr>
                     </a:p>
                   </a:txBody>
-                  <a:tcPr marL="91440" marR="91440" marT="45720" marB="45720" anchor="ctr">
+                  <a:tcPr anchor="ctr">
                     <a:lnL w="9525" cap="flat" cmpd="sng" algn="ctr">
                       <a:solidFill>
                         <a:srgbClr val="C8D0DA"/>
@@ -9977,7 +10036,7 @@
                     <a:bodyPr/>
                     <a:lstStyle/>
                     <a:p>
-                      <a:pPr algn="ctr" indent="0" marL="0">
+                      <a:pPr marL="0" indent="0" algn="ctr">
                         <a:buNone/>
                       </a:pPr>
                       <a:r>
@@ -9998,7 +10057,7 @@
                       </a:endParaRPr>
                     </a:p>
                   </a:txBody>
-                  <a:tcPr marL="91440" marR="91440" marT="45720" marB="45720" anchor="ctr">
+                  <a:tcPr anchor="ctr">
                     <a:lnL w="9525" cap="flat" cmpd="sng" algn="ctr">
                       <a:solidFill>
                         <a:srgbClr val="C8D0DA"/>
@@ -10040,6 +10099,11 @@
                     </a:solidFill>
                   </a:tcPr>
                 </a:tc>
+                <a:extLst>
+                  <a:ext uri="{0D108BD9-81ED-4DB2-BD59-A6C34878D82A}">
+                    <a16:rowId xmlns:a16="http://schemas.microsoft.com/office/drawing/2014/main" val="10003"/>
+                  </a:ext>
+                </a:extLst>
               </a:tr>
               <a:tr h="256032">
                 <a:tc>
@@ -10047,7 +10111,7 @@
                     <a:bodyPr/>
                     <a:lstStyle/>
                     <a:p>
-                      <a:pPr algn="l" indent="0" marL="0">
+                      <a:pPr marL="0" indent="0" algn="l">
                         <a:buNone/>
                       </a:pPr>
                       <a:r>
@@ -10068,7 +10132,7 @@
                       </a:endParaRPr>
                     </a:p>
                   </a:txBody>
-                  <a:tcPr marL="91440" marR="91440" marT="45720" marB="45720" anchor="ctr">
+                  <a:tcPr anchor="ctr">
                     <a:lnL w="9525" cap="flat" cmpd="sng" algn="ctr">
                       <a:solidFill>
                         <a:srgbClr val="C8D0DA"/>
@@ -10115,7 +10179,7 @@
                     <a:bodyPr/>
                     <a:lstStyle/>
                     <a:p>
-                      <a:pPr algn="ctr" indent="0" marL="0">
+                      <a:pPr marL="0" indent="0" algn="ctr">
                         <a:buNone/>
                       </a:pPr>
                       <a:r>
@@ -10136,7 +10200,7 @@
                       </a:endParaRPr>
                     </a:p>
                   </a:txBody>
-                  <a:tcPr marL="91440" marR="91440" marT="45720" marB="45720" anchor="ctr">
+                  <a:tcPr anchor="ctr">
                     <a:lnL w="9525" cap="flat" cmpd="sng" algn="ctr">
                       <a:solidFill>
                         <a:srgbClr val="C8D0DA"/>
@@ -10183,7 +10247,7 @@
                     <a:bodyPr/>
                     <a:lstStyle/>
                     <a:p>
-                      <a:pPr algn="ctr" indent="0" marL="0">
+                      <a:pPr marL="0" indent="0" algn="ctr">
                         <a:buNone/>
                       </a:pPr>
                       <a:r>
@@ -10204,7 +10268,7 @@
                       </a:endParaRPr>
                     </a:p>
                   </a:txBody>
-                  <a:tcPr marL="91440" marR="91440" marT="45720" marB="45720" anchor="ctr">
+                  <a:tcPr anchor="ctr">
                     <a:lnL w="9525" cap="flat" cmpd="sng" algn="ctr">
                       <a:solidFill>
                         <a:srgbClr val="C8D0DA"/>
@@ -10246,6 +10310,11 @@
                     </a:solidFill>
                   </a:tcPr>
                 </a:tc>
+                <a:extLst>
+                  <a:ext uri="{0D108BD9-81ED-4DB2-BD59-A6C34878D82A}">
+                    <a16:rowId xmlns:a16="http://schemas.microsoft.com/office/drawing/2014/main" val="10004"/>
+                  </a:ext>
+                </a:extLst>
               </a:tr>
               <a:tr h="256032">
                 <a:tc>
@@ -10253,7 +10322,7 @@
                     <a:bodyPr/>
                     <a:lstStyle/>
                     <a:p>
-                      <a:pPr algn="l" indent="0" marL="0">
+                      <a:pPr marL="0" indent="0" algn="l">
                         <a:buNone/>
                       </a:pPr>
                       <a:r>
@@ -10274,7 +10343,7 @@
                       </a:endParaRPr>
                     </a:p>
                   </a:txBody>
-                  <a:tcPr marL="91440" marR="91440" marT="45720" marB="45720" anchor="ctr">
+                  <a:tcPr anchor="ctr">
                     <a:lnL w="9525" cap="flat" cmpd="sng" algn="ctr">
                       <a:solidFill>
                         <a:srgbClr val="C8D0DA"/>
@@ -10321,7 +10390,7 @@
                     <a:bodyPr/>
                     <a:lstStyle/>
                     <a:p>
-                      <a:pPr algn="ctr" indent="0" marL="0">
+                      <a:pPr marL="0" indent="0" algn="ctr">
                         <a:buNone/>
                       </a:pPr>
                       <a:r>
@@ -10342,7 +10411,7 @@
                       </a:endParaRPr>
                     </a:p>
                   </a:txBody>
-                  <a:tcPr marL="91440" marR="91440" marT="45720" marB="45720" anchor="ctr">
+                  <a:tcPr anchor="ctr">
                     <a:lnL w="9525" cap="flat" cmpd="sng" algn="ctr">
                       <a:solidFill>
                         <a:srgbClr val="C8D0DA"/>
@@ -10389,7 +10458,7 @@
                     <a:bodyPr/>
                     <a:lstStyle/>
                     <a:p>
-                      <a:pPr algn="ctr" indent="0" marL="0">
+                      <a:pPr marL="0" indent="0" algn="ctr">
                         <a:buNone/>
                       </a:pPr>
                       <a:r>
@@ -10410,7 +10479,7 @@
                       </a:endParaRPr>
                     </a:p>
                   </a:txBody>
-                  <a:tcPr marL="91440" marR="91440" marT="45720" marB="45720" anchor="ctr">
+                  <a:tcPr anchor="ctr">
                     <a:lnL w="9525" cap="flat" cmpd="sng" algn="ctr">
                       <a:solidFill>
                         <a:srgbClr val="C8D0DA"/>
@@ -10452,6 +10521,11 @@
                     </a:solidFill>
                   </a:tcPr>
                 </a:tc>
+                <a:extLst>
+                  <a:ext uri="{0D108BD9-81ED-4DB2-BD59-A6C34878D82A}">
+                    <a16:rowId xmlns:a16="http://schemas.microsoft.com/office/drawing/2014/main" val="10005"/>
+                  </a:ext>
+                </a:extLst>
               </a:tr>
             </a:tbl>
           </a:graphicData>
@@ -10478,7 +10552,7 @@
           <a:bodyPr wrap="square" rtlCol="0" anchor="t"/>
           <a:lstStyle/>
           <a:p>
-            <a:pPr indent="0" marL="0">
+            <a:pPr marL="0" indent="0">
               <a:lnSpc>
                 <a:spcPct val="100000"/>
               </a:lnSpc>
@@ -10495,12 +10569,6 @@
               </a:rPr>
               <a:t>Diagnostico.  </a:t>
             </a:r>
-            <a:pPr indent="0" marL="0">
-              <a:lnSpc>
-                <a:spcPct val="100000"/>
-              </a:lnSpc>
-              <a:buNone/>
-            </a:pPr>
             <a:r>
               <a:rPr lang="en-US" sz="1000" dirty="0">
                 <a:solidFill>
@@ -10513,12 +10581,6 @@
               <a:t>Muchas impresiones y cero clics: el buscador muestra el dominio por contenido que no le pertenece. Invisible para el dueno, porque el sitio se ve normal.
 </a:t>
             </a:r>
-            <a:pPr indent="0" marL="0">
-              <a:lnSpc>
-                <a:spcPct val="100000"/>
-              </a:lnSpc>
-              <a:buNone/>
-            </a:pPr>
             <a:r>
               <a:rPr lang="en-US" sz="1000" b="1" dirty="0">
                 <a:solidFill>
@@ -10530,12 +10592,6 @@
               </a:rPr>
               <a:t>Respuesta.  </a:t>
             </a:r>
-            <a:pPr indent="0" marL="0">
-              <a:lnSpc>
-                <a:spcPct val="100000"/>
-              </a:lnSpc>
-              <a:buNone/>
-            </a:pPr>
             <a:r>
               <a:rPr lang="en-US" sz="1000" dirty="0">
                 <a:solidFill>
@@ -10570,6 +10626,13 @@
           </a:solidFill>
           <a:ln/>
         </p:spPr>
+        <p:txBody>
+          <a:bodyPr/>
+          <a:lstStyle/>
+          <a:p>
+            <a:endParaRPr lang="es-GT"/>
+          </a:p>
+        </p:txBody>
       </p:sp>
       <p:sp>
         <p:nvSpPr>
@@ -10592,7 +10655,7 @@
           <a:bodyPr wrap="square" rtlCol="0" anchor="ctr"/>
           <a:lstStyle/>
           <a:p>
-            <a:pPr indent="0" marL="0">
+            <a:pPr marL="0" indent="0">
               <a:buNone/>
             </a:pPr>
             <a:r>
@@ -10631,7 +10694,7 @@
           <a:bodyPr wrap="square" rtlCol="0" anchor="ctr"/>
           <a:lstStyle/>
           <a:p>
-            <a:pPr algn="r" indent="0" marL="0">
+            <a:pPr marL="0" indent="0" algn="r">
               <a:buNone/>
             </a:pPr>
             <a:r>
@@ -10670,7 +10733,7 @@
           <a:bodyPr wrap="square" rtlCol="0" anchor="ctr"/>
           <a:lstStyle/>
           <a:p>
-            <a:pPr indent="0" marL="0">
+            <a:pPr marL="0" indent="0">
               <a:buNone/>
             </a:pPr>
             <a:r>
@@ -10732,6 +10795,13 @@
           </a:solidFill>
           <a:ln/>
         </p:spPr>
+        <p:txBody>
+          <a:bodyPr/>
+          <a:lstStyle/>
+          <a:p>
+            <a:endParaRPr lang="es-GT"/>
+          </a:p>
+        </p:txBody>
       </p:sp>
       <p:sp>
         <p:nvSpPr>
@@ -10752,6 +10822,13 @@
           </a:solidFill>
           <a:ln/>
         </p:spPr>
+        <p:txBody>
+          <a:bodyPr/>
+          <a:lstStyle/>
+          <a:p>
+            <a:endParaRPr lang="es-GT"/>
+          </a:p>
+        </p:txBody>
       </p:sp>
       <p:sp>
         <p:nvSpPr>
@@ -10774,7 +10851,7 @@
           <a:bodyPr wrap="square" rtlCol="0" anchor="ctr"/>
           <a:lstStyle/>
           <a:p>
-            <a:pPr algn="ctr" indent="0" marL="0">
+            <a:pPr marL="0" indent="0" algn="ctr">
               <a:buNone/>
             </a:pPr>
             <a:r>
@@ -10813,7 +10890,7 @@
           <a:bodyPr wrap="square" rtlCol="0" anchor="ctr"/>
           <a:lstStyle/>
           <a:p>
-            <a:pPr indent="0" marL="0">
+            <a:pPr marL="0" indent="0">
               <a:buNone/>
             </a:pPr>
             <a:r>
@@ -10852,7 +10929,7 @@
           <a:bodyPr wrap="square" rtlCol="0" anchor="ctr"/>
           <a:lstStyle/>
           <a:p>
-            <a:pPr indent="0" marL="0">
+            <a:pPr marL="0" indent="0">
               <a:buNone/>
             </a:pPr>
             <a:r>
@@ -10886,17 +10963,41 @@
         </p:nvGraphicFramePr>
         <p:xfrm>
           <a:off x="384048" y="1078992"/>
-          <a:ext cx="8375904" cy="914400"/>
+          <a:ext cx="8375904" cy="2176272"/>
         </p:xfrm>
         <a:graphic>
           <a:graphicData uri="http://schemas.openxmlformats.org/drawingml/2006/table">
             <a:tbl>
               <a:tblPr/>
               <a:tblGrid>
-                <a:gridCol w="1572768"/>
-                <a:gridCol w="1627632"/>
-                <a:gridCol w="4041648"/>
-                <a:gridCol w="1133856"/>
+                <a:gridCol w="1572768">
+                  <a:extLst>
+                    <a:ext uri="{9D8B030D-6E8A-4147-A177-3AD203B41FA5}">
+                      <a16:colId xmlns:a16="http://schemas.microsoft.com/office/drawing/2014/main" val="20000"/>
+                    </a:ext>
+                  </a:extLst>
+                </a:gridCol>
+                <a:gridCol w="1627632">
+                  <a:extLst>
+                    <a:ext uri="{9D8B030D-6E8A-4147-A177-3AD203B41FA5}">
+                      <a16:colId xmlns:a16="http://schemas.microsoft.com/office/drawing/2014/main" val="20001"/>
+                    </a:ext>
+                  </a:extLst>
+                </a:gridCol>
+                <a:gridCol w="4041648">
+                  <a:extLst>
+                    <a:ext uri="{9D8B030D-6E8A-4147-A177-3AD203B41FA5}">
+                      <a16:colId xmlns:a16="http://schemas.microsoft.com/office/drawing/2014/main" val="20002"/>
+                    </a:ext>
+                  </a:extLst>
+                </a:gridCol>
+                <a:gridCol w="1133856">
+                  <a:extLst>
+                    <a:ext uri="{9D8B030D-6E8A-4147-A177-3AD203B41FA5}">
+                      <a16:colId xmlns:a16="http://schemas.microsoft.com/office/drawing/2014/main" val="20003"/>
+                    </a:ext>
+                  </a:extLst>
+                </a:gridCol>
               </a:tblGrid>
               <a:tr h="310896">
                 <a:tc>
@@ -10904,7 +11005,7 @@
                     <a:bodyPr/>
                     <a:lstStyle/>
                     <a:p>
-                      <a:pPr algn="l" indent="0" marL="0">
+                      <a:pPr marL="0" indent="0" algn="l">
                         <a:buNone/>
                       </a:pPr>
                       <a:r>
@@ -10925,7 +11026,7 @@
                       </a:endParaRPr>
                     </a:p>
                   </a:txBody>
-                  <a:tcPr marL="91440" marR="91440" marT="45720" marB="45720" anchor="ctr">
+                  <a:tcPr anchor="ctr">
                     <a:lnL w="9525" cap="flat" cmpd="sng" algn="ctr">
                       <a:solidFill>
                         <a:srgbClr val="C8D0DA"/>
@@ -10972,7 +11073,7 @@
                     <a:bodyPr/>
                     <a:lstStyle/>
                     <a:p>
-                      <a:pPr algn="l" indent="0" marL="0">
+                      <a:pPr marL="0" indent="0" algn="l">
                         <a:buNone/>
                       </a:pPr>
                       <a:r>
@@ -10993,7 +11094,7 @@
                       </a:endParaRPr>
                     </a:p>
                   </a:txBody>
-                  <a:tcPr marL="91440" marR="91440" marT="45720" marB="45720" anchor="ctr">
+                  <a:tcPr anchor="ctr">
                     <a:lnL w="9525" cap="flat" cmpd="sng" algn="ctr">
                       <a:solidFill>
                         <a:srgbClr val="C8D0DA"/>
@@ -11040,7 +11141,7 @@
                     <a:bodyPr/>
                     <a:lstStyle/>
                     <a:p>
-                      <a:pPr algn="l" indent="0" marL="0">
+                      <a:pPr marL="0" indent="0" algn="l">
                         <a:buNone/>
                       </a:pPr>
                       <a:r>
@@ -11061,7 +11162,7 @@
                       </a:endParaRPr>
                     </a:p>
                   </a:txBody>
-                  <a:tcPr marL="91440" marR="91440" marT="45720" marB="45720" anchor="ctr">
+                  <a:tcPr anchor="ctr">
                     <a:lnL w="9525" cap="flat" cmpd="sng" algn="ctr">
                       <a:solidFill>
                         <a:srgbClr val="C8D0DA"/>
@@ -11108,7 +11209,7 @@
                     <a:bodyPr/>
                     <a:lstStyle/>
                     <a:p>
-                      <a:pPr algn="l" indent="0" marL="0">
+                      <a:pPr marL="0" indent="0" algn="l">
                         <a:buNone/>
                       </a:pPr>
                       <a:r>
@@ -11129,7 +11230,7 @@
                       </a:endParaRPr>
                     </a:p>
                   </a:txBody>
-                  <a:tcPr marL="91440" marR="91440" marT="45720" marB="45720" anchor="ctr">
+                  <a:tcPr anchor="ctr">
                     <a:lnL w="9525" cap="flat" cmpd="sng" algn="ctr">
                       <a:solidFill>
                         <a:srgbClr val="C8D0DA"/>
@@ -11171,6 +11272,11 @@
                     </a:solidFill>
                   </a:tcPr>
                 </a:tc>
+                <a:extLst>
+                  <a:ext uri="{0D108BD9-81ED-4DB2-BD59-A6C34878D82A}">
+                    <a16:rowId xmlns:a16="http://schemas.microsoft.com/office/drawing/2014/main" val="10000"/>
+                  </a:ext>
+                </a:extLst>
               </a:tr>
               <a:tr h="310896">
                 <a:tc>
@@ -11178,7 +11284,7 @@
                     <a:bodyPr/>
                     <a:lstStyle/>
                     <a:p>
-                      <a:pPr algn="l" indent="0" marL="0">
+                      <a:pPr marL="0" indent="0" algn="l">
                         <a:buNone/>
                       </a:pPr>
                       <a:r>
@@ -11199,7 +11305,7 @@
                       </a:endParaRPr>
                     </a:p>
                   </a:txBody>
-                  <a:tcPr marL="91440" marR="91440" marT="45720" marB="45720" anchor="ctr">
+                  <a:tcPr anchor="ctr">
                     <a:lnL w="9525" cap="flat" cmpd="sng" algn="ctr">
                       <a:solidFill>
                         <a:srgbClr val="C8D0DA"/>
@@ -11243,7 +11349,7 @@
                     <a:bodyPr/>
                     <a:lstStyle/>
                     <a:p>
-                      <a:pPr algn="l" indent="0" marL="0">
+                      <a:pPr marL="0" indent="0" algn="l">
                         <a:buNone/>
                       </a:pPr>
                       <a:r>
@@ -11264,7 +11370,7 @@
                       </a:endParaRPr>
                     </a:p>
                   </a:txBody>
-                  <a:tcPr marL="91440" marR="91440" marT="45720" marB="45720" anchor="ctr">
+                  <a:tcPr anchor="ctr">
                     <a:lnL w="9525" cap="flat" cmpd="sng" algn="ctr">
                       <a:solidFill>
                         <a:srgbClr val="C8D0DA"/>
@@ -11308,7 +11414,7 @@
                     <a:bodyPr/>
                     <a:lstStyle/>
                     <a:p>
-                      <a:pPr algn="l" indent="0" marL="0">
+                      <a:pPr marL="0" indent="0" algn="l">
                         <a:buNone/>
                       </a:pPr>
                       <a:r>
@@ -11329,7 +11435,7 @@
                       </a:endParaRPr>
                     </a:p>
                   </a:txBody>
-                  <a:tcPr marL="91440" marR="91440" marT="45720" marB="45720" anchor="ctr">
+                  <a:tcPr anchor="ctr">
                     <a:lnL w="9525" cap="flat" cmpd="sng" algn="ctr">
                       <a:solidFill>
                         <a:srgbClr val="C8D0DA"/>
@@ -11373,7 +11479,7 @@
                     <a:bodyPr/>
                     <a:lstStyle/>
                     <a:p>
-                      <a:pPr algn="ctr" indent="0" marL="0">
+                      <a:pPr marL="0" indent="0" algn="ctr">
                         <a:buNone/>
                       </a:pPr>
                       <a:r>
@@ -11394,7 +11500,7 @@
                       </a:endParaRPr>
                     </a:p>
                   </a:txBody>
-                  <a:tcPr marL="91440" marR="91440" marT="45720" marB="45720" anchor="ctr">
+                  <a:tcPr anchor="ctr">
                     <a:lnL w="9525" cap="flat" cmpd="sng" algn="ctr">
                       <a:solidFill>
                         <a:srgbClr val="C8D0DA"/>
@@ -11433,6 +11539,11 @@
                     </a:lnB>
                   </a:tcPr>
                 </a:tc>
+                <a:extLst>
+                  <a:ext uri="{0D108BD9-81ED-4DB2-BD59-A6C34878D82A}">
+                    <a16:rowId xmlns:a16="http://schemas.microsoft.com/office/drawing/2014/main" val="10001"/>
+                  </a:ext>
+                </a:extLst>
               </a:tr>
               <a:tr h="310896">
                 <a:tc>
@@ -11440,7 +11551,7 @@
                     <a:bodyPr/>
                     <a:lstStyle/>
                     <a:p>
-                      <a:pPr algn="l" indent="0" marL="0">
+                      <a:pPr marL="0" indent="0" algn="l">
                         <a:buNone/>
                       </a:pPr>
                       <a:r>
@@ -11461,7 +11572,7 @@
                       </a:endParaRPr>
                     </a:p>
                   </a:txBody>
-                  <a:tcPr marL="91440" marR="91440" marT="45720" marB="45720" anchor="ctr">
+                  <a:tcPr anchor="ctr">
                     <a:lnL w="9525" cap="flat" cmpd="sng" algn="ctr">
                       <a:solidFill>
                         <a:srgbClr val="C8D0DA"/>
@@ -11505,7 +11616,7 @@
                     <a:bodyPr/>
                     <a:lstStyle/>
                     <a:p>
-                      <a:pPr algn="l" indent="0" marL="0">
+                      <a:pPr marL="0" indent="0" algn="l">
                         <a:buNone/>
                       </a:pPr>
                       <a:r>
@@ -11526,7 +11637,7 @@
                       </a:endParaRPr>
                     </a:p>
                   </a:txBody>
-                  <a:tcPr marL="91440" marR="91440" marT="45720" marB="45720" anchor="ctr">
+                  <a:tcPr anchor="ctr">
                     <a:lnL w="9525" cap="flat" cmpd="sng" algn="ctr">
                       <a:solidFill>
                         <a:srgbClr val="C8D0DA"/>
@@ -11570,7 +11681,7 @@
                     <a:bodyPr/>
                     <a:lstStyle/>
                     <a:p>
-                      <a:pPr algn="l" indent="0" marL="0">
+                      <a:pPr marL="0" indent="0" algn="l">
                         <a:buNone/>
                       </a:pPr>
                       <a:r>
@@ -11591,7 +11702,7 @@
                       </a:endParaRPr>
                     </a:p>
                   </a:txBody>
-                  <a:tcPr marL="91440" marR="91440" marT="45720" marB="45720" anchor="ctr">
+                  <a:tcPr anchor="ctr">
                     <a:lnL w="9525" cap="flat" cmpd="sng" algn="ctr">
                       <a:solidFill>
                         <a:srgbClr val="C8D0DA"/>
@@ -11635,7 +11746,7 @@
                     <a:bodyPr/>
                     <a:lstStyle/>
                     <a:p>
-                      <a:pPr algn="ctr" indent="0" marL="0">
+                      <a:pPr marL="0" indent="0" algn="ctr">
                         <a:buNone/>
                       </a:pPr>
                       <a:r>
@@ -11656,7 +11767,7 @@
                       </a:endParaRPr>
                     </a:p>
                   </a:txBody>
-                  <a:tcPr marL="91440" marR="91440" marT="45720" marB="45720" anchor="ctr">
+                  <a:tcPr anchor="ctr">
                     <a:lnL w="9525" cap="flat" cmpd="sng" algn="ctr">
                       <a:solidFill>
                         <a:srgbClr val="C8D0DA"/>
@@ -11695,6 +11806,11 @@
                     </a:lnB>
                   </a:tcPr>
                 </a:tc>
+                <a:extLst>
+                  <a:ext uri="{0D108BD9-81ED-4DB2-BD59-A6C34878D82A}">
+                    <a16:rowId xmlns:a16="http://schemas.microsoft.com/office/drawing/2014/main" val="10002"/>
+                  </a:ext>
+                </a:extLst>
               </a:tr>
               <a:tr h="310896">
                 <a:tc>
@@ -11702,7 +11818,7 @@
                     <a:bodyPr/>
                     <a:lstStyle/>
                     <a:p>
-                      <a:pPr algn="l" indent="0" marL="0">
+                      <a:pPr marL="0" indent="0" algn="l">
                         <a:buNone/>
                       </a:pPr>
                       <a:r>
@@ -11723,7 +11839,7 @@
                       </a:endParaRPr>
                     </a:p>
                   </a:txBody>
-                  <a:tcPr marL="91440" marR="91440" marT="45720" marB="45720" anchor="ctr">
+                  <a:tcPr anchor="ctr">
                     <a:lnL w="9525" cap="flat" cmpd="sng" algn="ctr">
                       <a:solidFill>
                         <a:srgbClr val="C8D0DA"/>
@@ -11767,7 +11883,7 @@
                     <a:bodyPr/>
                     <a:lstStyle/>
                     <a:p>
-                      <a:pPr algn="l" indent="0" marL="0">
+                      <a:pPr marL="0" indent="0" algn="l">
                         <a:buNone/>
                       </a:pPr>
                       <a:r>
@@ -11788,7 +11904,7 @@
                       </a:endParaRPr>
                     </a:p>
                   </a:txBody>
-                  <a:tcPr marL="91440" marR="91440" marT="45720" marB="45720" anchor="ctr">
+                  <a:tcPr anchor="ctr">
                     <a:lnL w="9525" cap="flat" cmpd="sng" algn="ctr">
                       <a:solidFill>
                         <a:srgbClr val="C8D0DA"/>
@@ -11832,7 +11948,7 @@
                     <a:bodyPr/>
                     <a:lstStyle/>
                     <a:p>
-                      <a:pPr algn="l" indent="0" marL="0">
+                      <a:pPr marL="0" indent="0" algn="l">
                         <a:buNone/>
                       </a:pPr>
                       <a:r>
@@ -11853,7 +11969,7 @@
                       </a:endParaRPr>
                     </a:p>
                   </a:txBody>
-                  <a:tcPr marL="91440" marR="91440" marT="45720" marB="45720" anchor="ctr">
+                  <a:tcPr anchor="ctr">
                     <a:lnL w="9525" cap="flat" cmpd="sng" algn="ctr">
                       <a:solidFill>
                         <a:srgbClr val="C8D0DA"/>
@@ -11897,7 +12013,7 @@
                     <a:bodyPr/>
                     <a:lstStyle/>
                     <a:p>
-                      <a:pPr algn="ctr" indent="0" marL="0">
+                      <a:pPr marL="0" indent="0" algn="ctr">
                         <a:buNone/>
                       </a:pPr>
                       <a:r>
@@ -11918,7 +12034,7 @@
                       </a:endParaRPr>
                     </a:p>
                   </a:txBody>
-                  <a:tcPr marL="91440" marR="91440" marT="45720" marB="45720" anchor="ctr">
+                  <a:tcPr anchor="ctr">
                     <a:lnL w="9525" cap="flat" cmpd="sng" algn="ctr">
                       <a:solidFill>
                         <a:srgbClr val="C8D0DA"/>
@@ -11957,6 +12073,11 @@
                     </a:lnB>
                   </a:tcPr>
                 </a:tc>
+                <a:extLst>
+                  <a:ext uri="{0D108BD9-81ED-4DB2-BD59-A6C34878D82A}">
+                    <a16:rowId xmlns:a16="http://schemas.microsoft.com/office/drawing/2014/main" val="10003"/>
+                  </a:ext>
+                </a:extLst>
               </a:tr>
               <a:tr h="310896">
                 <a:tc>
@@ -11964,7 +12085,7 @@
                     <a:bodyPr/>
                     <a:lstStyle/>
                     <a:p>
-                      <a:pPr algn="l" indent="0" marL="0">
+                      <a:pPr marL="0" indent="0" algn="l">
                         <a:buNone/>
                       </a:pPr>
                       <a:r>
@@ -11985,7 +12106,7 @@
                       </a:endParaRPr>
                     </a:p>
                   </a:txBody>
-                  <a:tcPr marL="91440" marR="91440" marT="45720" marB="45720" anchor="ctr">
+                  <a:tcPr anchor="ctr">
                     <a:lnL w="9525" cap="flat" cmpd="sng" algn="ctr">
                       <a:solidFill>
                         <a:srgbClr val="C8D0DA"/>
@@ -12029,7 +12150,7 @@
                     <a:bodyPr/>
                     <a:lstStyle/>
                     <a:p>
-                      <a:pPr algn="l" indent="0" marL="0">
+                      <a:pPr marL="0" indent="0" algn="l">
                         <a:buNone/>
                       </a:pPr>
                       <a:r>
@@ -12050,7 +12171,7 @@
                       </a:endParaRPr>
                     </a:p>
                   </a:txBody>
-                  <a:tcPr marL="91440" marR="91440" marT="45720" marB="45720" anchor="ctr">
+                  <a:tcPr anchor="ctr">
                     <a:lnL w="9525" cap="flat" cmpd="sng" algn="ctr">
                       <a:solidFill>
                         <a:srgbClr val="C8D0DA"/>
@@ -12094,7 +12215,7 @@
                     <a:bodyPr/>
                     <a:lstStyle/>
                     <a:p>
-                      <a:pPr algn="l" indent="0" marL="0">
+                      <a:pPr marL="0" indent="0" algn="l">
                         <a:buNone/>
                       </a:pPr>
                       <a:r>
@@ -12115,7 +12236,7 @@
                       </a:endParaRPr>
                     </a:p>
                   </a:txBody>
-                  <a:tcPr marL="91440" marR="91440" marT="45720" marB="45720" anchor="ctr">
+                  <a:tcPr anchor="ctr">
                     <a:lnL w="9525" cap="flat" cmpd="sng" algn="ctr">
                       <a:solidFill>
                         <a:srgbClr val="C8D0DA"/>
@@ -12159,7 +12280,7 @@
                     <a:bodyPr/>
                     <a:lstStyle/>
                     <a:p>
-                      <a:pPr algn="ctr" indent="0" marL="0">
+                      <a:pPr marL="0" indent="0" algn="ctr">
                         <a:buNone/>
                       </a:pPr>
                       <a:r>
@@ -12180,7 +12301,7 @@
                       </a:endParaRPr>
                     </a:p>
                   </a:txBody>
-                  <a:tcPr marL="91440" marR="91440" marT="45720" marB="45720" anchor="ctr">
+                  <a:tcPr anchor="ctr">
                     <a:lnL w="9525" cap="flat" cmpd="sng" algn="ctr">
                       <a:solidFill>
                         <a:srgbClr val="C8D0DA"/>
@@ -12219,6 +12340,11 @@
                     </a:lnB>
                   </a:tcPr>
                 </a:tc>
+                <a:extLst>
+                  <a:ext uri="{0D108BD9-81ED-4DB2-BD59-A6C34878D82A}">
+                    <a16:rowId xmlns:a16="http://schemas.microsoft.com/office/drawing/2014/main" val="10004"/>
+                  </a:ext>
+                </a:extLst>
               </a:tr>
               <a:tr h="310896">
                 <a:tc>
@@ -12226,7 +12352,7 @@
                     <a:bodyPr/>
                     <a:lstStyle/>
                     <a:p>
-                      <a:pPr algn="l" indent="0" marL="0">
+                      <a:pPr marL="0" indent="0" algn="l">
                         <a:buNone/>
                       </a:pPr>
                       <a:r>
@@ -12247,7 +12373,7 @@
                       </a:endParaRPr>
                     </a:p>
                   </a:txBody>
-                  <a:tcPr marL="91440" marR="91440" marT="45720" marB="45720" anchor="ctr">
+                  <a:tcPr anchor="ctr">
                     <a:lnL w="9525" cap="flat" cmpd="sng" algn="ctr">
                       <a:solidFill>
                         <a:srgbClr val="C8D0DA"/>
@@ -12291,7 +12417,7 @@
                     <a:bodyPr/>
                     <a:lstStyle/>
                     <a:p>
-                      <a:pPr algn="l" indent="0" marL="0">
+                      <a:pPr marL="0" indent="0" algn="l">
                         <a:buNone/>
                       </a:pPr>
                       <a:r>
@@ -12312,7 +12438,7 @@
                       </a:endParaRPr>
                     </a:p>
                   </a:txBody>
-                  <a:tcPr marL="91440" marR="91440" marT="45720" marB="45720" anchor="ctr">
+                  <a:tcPr anchor="ctr">
                     <a:lnL w="9525" cap="flat" cmpd="sng" algn="ctr">
                       <a:solidFill>
                         <a:srgbClr val="C8D0DA"/>
@@ -12356,7 +12482,7 @@
                     <a:bodyPr/>
                     <a:lstStyle/>
                     <a:p>
-                      <a:pPr algn="l" indent="0" marL="0">
+                      <a:pPr marL="0" indent="0" algn="l">
                         <a:buNone/>
                       </a:pPr>
                       <a:r>
@@ -12377,7 +12503,7 @@
                       </a:endParaRPr>
                     </a:p>
                   </a:txBody>
-                  <a:tcPr marL="91440" marR="91440" marT="45720" marB="45720" anchor="ctr">
+                  <a:tcPr anchor="ctr">
                     <a:lnL w="9525" cap="flat" cmpd="sng" algn="ctr">
                       <a:solidFill>
                         <a:srgbClr val="C8D0DA"/>
@@ -12421,7 +12547,7 @@
                     <a:bodyPr/>
                     <a:lstStyle/>
                     <a:p>
-                      <a:pPr algn="ctr" indent="0" marL="0">
+                      <a:pPr marL="0" indent="0" algn="ctr">
                         <a:buNone/>
                       </a:pPr>
                       <a:r>
@@ -12442,7 +12568,7 @@
                       </a:endParaRPr>
                     </a:p>
                   </a:txBody>
-                  <a:tcPr marL="91440" marR="91440" marT="45720" marB="45720" anchor="ctr">
+                  <a:tcPr anchor="ctr">
                     <a:lnL w="9525" cap="flat" cmpd="sng" algn="ctr">
                       <a:solidFill>
                         <a:srgbClr val="C8D0DA"/>
@@ -12481,6 +12607,11 @@
                     </a:lnB>
                   </a:tcPr>
                 </a:tc>
+                <a:extLst>
+                  <a:ext uri="{0D108BD9-81ED-4DB2-BD59-A6C34878D82A}">
+                    <a16:rowId xmlns:a16="http://schemas.microsoft.com/office/drawing/2014/main" val="10005"/>
+                  </a:ext>
+                </a:extLst>
               </a:tr>
               <a:tr h="310896">
                 <a:tc>
@@ -12488,7 +12619,7 @@
                     <a:bodyPr/>
                     <a:lstStyle/>
                     <a:p>
-                      <a:pPr algn="l" indent="0" marL="0">
+                      <a:pPr marL="0" indent="0" algn="l">
                         <a:buNone/>
                       </a:pPr>
                       <a:r>
@@ -12509,7 +12640,7 @@
                       </a:endParaRPr>
                     </a:p>
                   </a:txBody>
-                  <a:tcPr marL="91440" marR="91440" marT="45720" marB="45720" anchor="ctr">
+                  <a:tcPr anchor="ctr">
                     <a:lnL w="9525" cap="flat" cmpd="sng" algn="ctr">
                       <a:solidFill>
                         <a:srgbClr val="C8D0DA"/>
@@ -12553,7 +12684,7 @@
                     <a:bodyPr/>
                     <a:lstStyle/>
                     <a:p>
-                      <a:pPr algn="l" indent="0" marL="0">
+                      <a:pPr marL="0" indent="0" algn="l">
                         <a:buNone/>
                       </a:pPr>
                       <a:r>
@@ -12574,7 +12705,7 @@
                       </a:endParaRPr>
                     </a:p>
                   </a:txBody>
-                  <a:tcPr marL="91440" marR="91440" marT="45720" marB="45720" anchor="ctr">
+                  <a:tcPr anchor="ctr">
                     <a:lnL w="9525" cap="flat" cmpd="sng" algn="ctr">
                       <a:solidFill>
                         <a:srgbClr val="C8D0DA"/>
@@ -12618,7 +12749,7 @@
                     <a:bodyPr/>
                     <a:lstStyle/>
                     <a:p>
-                      <a:pPr algn="l" indent="0" marL="0">
+                      <a:pPr marL="0" indent="0" algn="l">
                         <a:buNone/>
                       </a:pPr>
                       <a:r>
@@ -12639,7 +12770,7 @@
                       </a:endParaRPr>
                     </a:p>
                   </a:txBody>
-                  <a:tcPr marL="91440" marR="91440" marT="45720" marB="45720" anchor="ctr">
+                  <a:tcPr anchor="ctr">
                     <a:lnL w="9525" cap="flat" cmpd="sng" algn="ctr">
                       <a:solidFill>
                         <a:srgbClr val="C8D0DA"/>
@@ -12683,7 +12814,7 @@
                     <a:bodyPr/>
                     <a:lstStyle/>
                     <a:p>
-                      <a:pPr algn="ctr" indent="0" marL="0">
+                      <a:pPr marL="0" indent="0" algn="ctr">
                         <a:buNone/>
                       </a:pPr>
                       <a:r>
@@ -12704,7 +12835,7 @@
                       </a:endParaRPr>
                     </a:p>
                   </a:txBody>
-                  <a:tcPr marL="91440" marR="91440" marT="45720" marB="45720" anchor="ctr">
+                  <a:tcPr anchor="ctr">
                     <a:lnL w="9525" cap="flat" cmpd="sng" algn="ctr">
                       <a:solidFill>
                         <a:srgbClr val="C8D0DA"/>
@@ -12743,6 +12874,11 @@
                     </a:lnB>
                   </a:tcPr>
                 </a:tc>
+                <a:extLst>
+                  <a:ext uri="{0D108BD9-81ED-4DB2-BD59-A6C34878D82A}">
+                    <a16:rowId xmlns:a16="http://schemas.microsoft.com/office/drawing/2014/main" val="10006"/>
+                  </a:ext>
+                </a:extLst>
               </a:tr>
             </a:tbl>
           </a:graphicData>
@@ -12767,6 +12903,13 @@
           </a:solidFill>
           <a:ln/>
         </p:spPr>
+        <p:txBody>
+          <a:bodyPr/>
+          <a:lstStyle/>
+          <a:p>
+            <a:endParaRPr lang="es-GT"/>
+          </a:p>
+        </p:txBody>
       </p:sp>
       <p:sp>
         <p:nvSpPr>
@@ -12789,11 +12932,11 @@
           <a:bodyPr wrap="square" rtlCol="0" anchor="ctr"/>
           <a:lstStyle/>
           <a:p>
-            <a:pPr indent="0" marL="0">
+            <a:pPr marL="0" indent="0">
               <a:buNone/>
             </a:pPr>
             <a:r>
-              <a:rPr lang="en-US" sz="1100" b="1" spc="60" kern="0" dirty="0">
+              <a:rPr lang="en-US" sz="1100" b="1" kern="0" spc="60" dirty="0">
                 <a:solidFill>
                   <a:srgbClr val="FFFFFF"/>
                 </a:solidFill>
@@ -12831,6 +12974,13 @@
             <a:prstDash val="solid"/>
           </a:ln>
         </p:spPr>
+        <p:txBody>
+          <a:bodyPr/>
+          <a:lstStyle/>
+          <a:p>
+            <a:endParaRPr lang="es-GT"/>
+          </a:p>
+        </p:txBody>
       </p:sp>
       <p:sp>
         <p:nvSpPr>
@@ -12853,7 +13003,7 @@
           <a:bodyPr wrap="square" rtlCol="0" anchor="ctr"/>
           <a:lstStyle/>
           <a:p>
-            <a:pPr indent="0" marL="0">
+            <a:pPr marL="0" indent="0">
               <a:buNone/>
             </a:pPr>
             <a:r>
@@ -12867,9 +13017,6 @@
               </a:rPr>
               <a:t>Proteccion </a:t>
             </a:r>
-            <a:pPr indent="0" marL="0">
-              <a:buNone/>
-            </a:pPr>
             <a:r>
               <a:rPr lang="en-US" sz="1000" dirty="0">
                 <a:solidFill>
@@ -12881,9 +13028,6 @@
               </a:rPr>
               <a:t>desarrollada   ·   </a:t>
             </a:r>
-            <a:pPr indent="0" marL="0">
-              <a:buNone/>
-            </a:pPr>
             <a:r>
               <a:rPr lang="en-US" sz="1000" b="1" dirty="0">
                 <a:solidFill>
@@ -12895,9 +13039,6 @@
               </a:rPr>
               <a:t>Deteccion </a:t>
             </a:r>
-            <a:pPr indent="0" marL="0">
-              <a:buNone/>
-            </a:pPr>
             <a:r>
               <a:rPr lang="en-US" sz="1000" dirty="0">
                 <a:solidFill>
@@ -12909,9 +13050,6 @@
               </a:rPr>
               <a:t>antes parcial   ·   </a:t>
             </a:r>
-            <a:pPr indent="0" marL="0">
-              <a:buNone/>
-            </a:pPr>
             <a:r>
               <a:rPr lang="en-US" sz="1000" b="1" dirty="0">
                 <a:solidFill>
@@ -12923,9 +13061,6 @@
               </a:rPr>
               <a:t>Respuesta </a:t>
             </a:r>
-            <a:pPr indent="0" marL="0">
-              <a:buNone/>
-            </a:pPr>
             <a:r>
               <a:rPr lang="en-US" sz="1000" dirty="0">
                 <a:solidFill>
@@ -12960,6 +13095,13 @@
           </a:solidFill>
           <a:ln/>
         </p:spPr>
+        <p:txBody>
+          <a:bodyPr/>
+          <a:lstStyle/>
+          <a:p>
+            <a:endParaRPr lang="es-GT"/>
+          </a:p>
+        </p:txBody>
       </p:sp>
       <p:sp>
         <p:nvSpPr>
@@ -12982,11 +13124,11 @@
           <a:bodyPr wrap="square" rtlCol="0" anchor="ctr"/>
           <a:lstStyle/>
           <a:p>
-            <a:pPr indent="0" marL="0">
+            <a:pPr marL="0" indent="0">
               <a:buNone/>
             </a:pPr>
             <a:r>
-              <a:rPr lang="en-US" sz="1100" b="1" spc="60" kern="0" dirty="0">
+              <a:rPr lang="en-US" sz="1100" b="1" kern="0" spc="60" dirty="0">
                 <a:solidFill>
                   <a:srgbClr val="FFFFFF"/>
                 </a:solidFill>
@@ -13024,6 +13166,13 @@
             <a:prstDash val="solid"/>
           </a:ln>
         </p:spPr>
+        <p:txBody>
+          <a:bodyPr/>
+          <a:lstStyle/>
+          <a:p>
+            <a:endParaRPr lang="es-GT"/>
+          </a:p>
+        </p:txBody>
       </p:sp>
       <p:sp>
         <p:nvSpPr>
@@ -13046,7 +13195,7 @@
           <a:bodyPr wrap="square" rtlCol="0" anchor="ctr"/>
           <a:lstStyle/>
           <a:p>
-            <a:pPr indent="0" marL="0">
+            <a:pPr marL="0" indent="0">
               <a:buNone/>
             </a:pPr>
             <a:r>
@@ -13085,7 +13234,7 @@
           <a:bodyPr wrap="square" rtlCol="0" anchor="ctr"/>
           <a:lstStyle/>
           <a:p>
-            <a:pPr algn="ctr" indent="0" marL="0">
+            <a:pPr marL="0" indent="0" algn="ctr">
               <a:buNone/>
             </a:pPr>
             <a:r>
@@ -13124,7 +13273,7 @@
           <a:bodyPr wrap="square" rtlCol="0" anchor="ctr"/>
           <a:lstStyle/>
           <a:p>
-            <a:pPr algn="r" indent="0" marL="0">
+            <a:pPr marL="0" indent="0" algn="r">
               <a:buNone/>
             </a:pPr>
             <a:r>
@@ -13163,7 +13312,7 @@
           <a:bodyPr wrap="square" rtlCol="0" anchor="ctr"/>
           <a:lstStyle/>
           <a:p>
-            <a:pPr indent="0" marL="0">
+            <a:pPr marL="0" indent="0">
               <a:buNone/>
             </a:pPr>
             <a:r>
@@ -13197,6 +13346,7 @@
         <a:solidFill>
           <a:srgbClr val="0F2942"/>
         </a:solidFill>
+        <a:effectLst/>
       </p:bgPr>
     </p:bg>
     <p:spTree>
@@ -13232,6 +13382,13 @@
           </a:solidFill>
           <a:ln/>
         </p:spPr>
+        <p:txBody>
+          <a:bodyPr/>
+          <a:lstStyle/>
+          <a:p>
+            <a:endParaRPr lang="es-GT"/>
+          </a:p>
+        </p:txBody>
       </p:sp>
       <p:sp>
         <p:nvSpPr>
@@ -13254,7 +13411,7 @@
           <a:bodyPr wrap="square" rtlCol="0" anchor="ctr"/>
           <a:lstStyle/>
           <a:p>
-            <a:pPr indent="0" marL="0">
+            <a:pPr marL="0" indent="0">
               <a:buNone/>
             </a:pPr>
             <a:r>
@@ -13291,6 +13448,13 @@
           </a:solidFill>
           <a:ln/>
         </p:spPr>
+        <p:txBody>
+          <a:bodyPr/>
+          <a:lstStyle/>
+          <a:p>
+            <a:endParaRPr lang="es-GT"/>
+          </a:p>
+        </p:txBody>
       </p:sp>
       <p:sp>
         <p:nvSpPr>
@@ -13313,11 +13477,11 @@
           <a:bodyPr wrap="square" rtlCol="0" anchor="ctr"/>
           <a:lstStyle/>
           <a:p>
-            <a:pPr indent="0" marL="0">
+            <a:pPr marL="0" indent="0">
               <a:buNone/>
             </a:pPr>
             <a:r>
-              <a:rPr lang="en-US" sz="900" spc="50" kern="0" dirty="0">
+              <a:rPr lang="en-US" sz="900" kern="0" spc="50" dirty="0">
                 <a:solidFill>
                   <a:srgbClr val="9FB8CE"/>
                 </a:solidFill>
@@ -13352,7 +13516,7 @@
           <a:bodyPr wrap="square" rtlCol="0" anchor="t"/>
           <a:lstStyle/>
           <a:p>
-            <a:pPr indent="0" marL="0">
+            <a:pPr marL="0" indent="0">
               <a:buNone/>
             </a:pPr>
             <a:r>
@@ -13391,7 +13555,7 @@
           <a:bodyPr wrap="square" rtlCol="0" anchor="t"/>
           <a:lstStyle/>
           <a:p>
-            <a:pPr indent="0" marL="0">
+            <a:pPr marL="0" indent="0">
               <a:buNone/>
             </a:pPr>
             <a:r>
@@ -13428,6 +13592,13 @@
           </a:solidFill>
           <a:ln/>
         </p:spPr>
+        <p:txBody>
+          <a:bodyPr/>
+          <a:lstStyle/>
+          <a:p>
+            <a:endParaRPr lang="es-GT"/>
+          </a:p>
+        </p:txBody>
       </p:sp>
       <p:sp>
         <p:nvSpPr>
@@ -13450,11 +13621,11 @@
           <a:bodyPr wrap="square" rtlCol="0" anchor="ctr"/>
           <a:lstStyle/>
           <a:p>
-            <a:pPr indent="0" marL="0">
+            <a:pPr marL="0" indent="0">
               <a:buNone/>
             </a:pPr>
             <a:r>
-              <a:rPr lang="en-US" sz="900" spc="50" kern="0" dirty="0">
+              <a:rPr lang="en-US" sz="900" kern="0" spc="50" dirty="0">
                 <a:solidFill>
                   <a:srgbClr val="9FB8CE"/>
                 </a:solidFill>
@@ -13489,7 +13660,7 @@
           <a:bodyPr wrap="square" rtlCol="0" anchor="t"/>
           <a:lstStyle/>
           <a:p>
-            <a:pPr indent="0" marL="0">
+            <a:pPr marL="0" indent="0">
               <a:buNone/>
             </a:pPr>
             <a:r>
@@ -13506,7 +13677,7 @@
             <a:endParaRPr lang="en-US" sz="1300" dirty="0"/>
           </a:p>
           <a:p>
-            <a:pPr indent="0" marL="0">
+            <a:pPr marL="0" indent="0">
               <a:buNone/>
             </a:pPr>
             <a:r>
@@ -13545,7 +13716,7 @@
           <a:bodyPr wrap="square" rtlCol="0" anchor="t"/>
           <a:lstStyle/>
           <a:p>
-            <a:pPr indent="0" marL="0">
+            <a:pPr marL="0" indent="0">
               <a:buNone/>
             </a:pPr>
             <a:r>
@@ -13582,6 +13753,13 @@
           </a:solidFill>
           <a:ln/>
         </p:spPr>
+        <p:txBody>
+          <a:bodyPr/>
+          <a:lstStyle/>
+          <a:p>
+            <a:endParaRPr lang="es-GT"/>
+          </a:p>
+        </p:txBody>
       </p:sp>
       <p:sp>
         <p:nvSpPr>
@@ -13604,11 +13782,11 @@
           <a:bodyPr wrap="square" rtlCol="0" anchor="ctr"/>
           <a:lstStyle/>
           <a:p>
-            <a:pPr indent="0" marL="0">
+            <a:pPr marL="0" indent="0">
               <a:buNone/>
             </a:pPr>
             <a:r>
-              <a:rPr lang="en-US" sz="900" spc="50" kern="0" dirty="0">
+              <a:rPr lang="en-US" sz="900" kern="0" spc="50" dirty="0">
                 <a:solidFill>
                   <a:srgbClr val="9FB8CE"/>
                 </a:solidFill>
@@ -13643,7 +13821,7 @@
           <a:bodyPr wrap="square" rtlCol="0" anchor="t"/>
           <a:lstStyle/>
           <a:p>
-            <a:pPr indent="0" marL="0">
+            <a:pPr marL="0" indent="0">
               <a:buNone/>
             </a:pPr>
             <a:r>
@@ -13682,7 +13860,7 @@
           <a:bodyPr wrap="square" rtlCol="0" anchor="t"/>
           <a:lstStyle/>
           <a:p>
-            <a:pPr indent="0" marL="0">
+            <a:pPr marL="0" indent="0">
               <a:buNone/>
             </a:pPr>
             <a:r>
@@ -13719,6 +13897,13 @@
           </a:solidFill>
           <a:ln/>
         </p:spPr>
+        <p:txBody>
+          <a:bodyPr/>
+          <a:lstStyle/>
+          <a:p>
+            <a:endParaRPr lang="es-GT"/>
+          </a:p>
+        </p:txBody>
       </p:sp>
       <p:sp>
         <p:nvSpPr>
@@ -13741,7 +13926,7 @@
           <a:bodyPr wrap="square" rtlCol="0" anchor="ctr"/>
           <a:lstStyle/>
           <a:p>
-            <a:pPr indent="0" marL="0">
+            <a:pPr marL="0" indent="0">
               <a:buNone/>
             </a:pPr>
             <a:r>
@@ -13756,9 +13941,6 @@
               <a:t>Lo que no se puede medir, se declara.
 </a:t>
             </a:r>
-            <a:pPr indent="0" marL="0">
-              <a:buNone/>
-            </a:pPr>
             <a:r>
               <a:rPr lang="en-US" sz="1150" dirty="0">
                 <a:solidFill>
@@ -13795,7 +13977,7 @@
           <a:bodyPr wrap="square" rtlCol="0" anchor="ctr"/>
           <a:lstStyle/>
           <a:p>
-            <a:pPr indent="0" marL="0">
+            <a:pPr marL="0" indent="0">
               <a:buNone/>
             </a:pPr>
             <a:r>
@@ -14114,4 +14296,319 @@
     </a:ext>
   </a:extLst>
 </a:theme>
+</file>
+
+<file path=ppt/theme/theme2.xml><?xml version="1.0" encoding="utf-8"?>
+<a:theme xmlns:a="http://schemas.openxmlformats.org/drawingml/2006/main" name="Tema de Office">
+  <a:themeElements>
+    <a:clrScheme name="Office">
+      <a:dk1>
+        <a:sysClr val="windowText" lastClr="000000"/>
+      </a:dk1>
+      <a:lt1>
+        <a:sysClr val="window" lastClr="FFFFFF"/>
+      </a:lt1>
+      <a:dk2>
+        <a:srgbClr val="0E2841"/>
+      </a:dk2>
+      <a:lt2>
+        <a:srgbClr val="E8E8E8"/>
+      </a:lt2>
+      <a:accent1>
+        <a:srgbClr val="156082"/>
+      </a:accent1>
+      <a:accent2>
+        <a:srgbClr val="E97132"/>
+      </a:accent2>
+      <a:accent3>
+        <a:srgbClr val="196B24"/>
+      </a:accent3>
+      <a:accent4>
+        <a:srgbClr val="0F9ED5"/>
+      </a:accent4>
+      <a:accent5>
+        <a:srgbClr val="A02B93"/>
+      </a:accent5>
+      <a:accent6>
+        <a:srgbClr val="4EA72E"/>
+      </a:accent6>
+      <a:hlink>
+        <a:srgbClr val="467886"/>
+      </a:hlink>
+      <a:folHlink>
+        <a:srgbClr val="96607D"/>
+      </a:folHlink>
+    </a:clrScheme>
+    <a:fontScheme name="Office">
+      <a:majorFont>
+        <a:latin typeface="Aptos Display" panose="02110004020202020204"/>
+        <a:ea typeface=""/>
+        <a:cs typeface=""/>
+        <a:font script="Jpan" typeface="游ゴシック Light"/>
+        <a:font script="Hang" typeface="맑은 고딕"/>
+        <a:font script="Hans" typeface="等线 Light"/>
+        <a:font script="Hant" typeface="新細明體"/>
+        <a:font script="Arab" typeface="Times New Roman"/>
+        <a:font script="Hebr" typeface="Times New Roman"/>
+        <a:font script="Thai" typeface="Angsana New"/>
+        <a:font script="Ethi" typeface="Nyala"/>
+        <a:font script="Beng" typeface="Vrinda"/>
+        <a:font script="Gujr" typeface="Shruti"/>
+        <a:font script="Khmr" typeface="MoolBoran"/>
+        <a:font script="Knda" typeface="Tunga"/>
+        <a:font script="Guru" typeface="Raavi"/>
+        <a:font script="Cans" typeface="Euphemia"/>
+        <a:font script="Cher" typeface="Plantagenet Cherokee"/>
+        <a:font script="Yiii" typeface="Microsoft Yi Baiti"/>
+        <a:font script="Tibt" typeface="Microsoft Himalaya"/>
+        <a:font script="Thaa" typeface="MV Boli"/>
+        <a:font script="Deva" typeface="Mangal"/>
+        <a:font script="Telu" typeface="Gautami"/>
+        <a:font script="Taml" typeface="Latha"/>
+        <a:font script="Syrc" typeface="Estrangelo Edessa"/>
+        <a:font script="Orya" typeface="Kalinga"/>
+        <a:font script="Mlym" typeface="Kartika"/>
+        <a:font script="Laoo" typeface="DokChampa"/>
+        <a:font script="Sinh" typeface="Iskoola Pota"/>
+        <a:font script="Mong" typeface="Mongolian Baiti"/>
+        <a:font script="Viet" typeface="Times New Roman"/>
+        <a:font script="Uigh" typeface="Microsoft Uighur"/>
+        <a:font script="Geor" typeface="Sylfaen"/>
+        <a:font script="Armn" typeface="Arial"/>
+        <a:font script="Bugi" typeface="Leelawadee UI"/>
+        <a:font script="Bopo" typeface="Microsoft JhengHei"/>
+        <a:font script="Java" typeface="Javanese Text"/>
+        <a:font script="Lisu" typeface="Segoe UI"/>
+        <a:font script="Mymr" typeface="Myanmar Text"/>
+        <a:font script="Nkoo" typeface="Ebrima"/>
+        <a:font script="Olck" typeface="Nirmala UI"/>
+        <a:font script="Osma" typeface="Ebrima"/>
+        <a:font script="Phag" typeface="Phagspa"/>
+        <a:font script="Syrn" typeface="Estrangelo Edessa"/>
+        <a:font script="Syrj" typeface="Estrangelo Edessa"/>
+        <a:font script="Syre" typeface="Estrangelo Edessa"/>
+        <a:font script="Sora" typeface="Nirmala UI"/>
+        <a:font script="Tale" typeface="Microsoft Tai Le"/>
+        <a:font script="Talu" typeface="Microsoft New Tai Lue"/>
+        <a:font script="Tfng" typeface="Ebrima"/>
+      </a:majorFont>
+      <a:minorFont>
+        <a:latin typeface="Aptos" panose="02110004020202020204"/>
+        <a:ea typeface=""/>
+        <a:cs typeface=""/>
+        <a:font script="Jpan" typeface="游ゴシック"/>
+        <a:font script="Hang" typeface="맑은 고딕"/>
+        <a:font script="Hans" typeface="等线"/>
+        <a:font script="Hant" typeface="新細明體"/>
+        <a:font script="Arab" typeface="Arial"/>
+        <a:font script="Hebr" typeface="Arial"/>
+        <a:font script="Thai" typeface="Cordia New"/>
+        <a:font script="Ethi" typeface="Nyala"/>
+        <a:font script="Beng" typeface="Vrinda"/>
+        <a:font script="Gujr" typeface="Shruti"/>
+        <a:font script="Khmr" typeface="DaunPenh"/>
+        <a:font script="Knda" typeface="Tunga"/>
+        <a:font script="Guru" typeface="Raavi"/>
+        <a:font script="Cans" typeface="Euphemia"/>
+        <a:font script="Cher" typeface="Plantagenet Cherokee"/>
+        <a:font script="Yiii" typeface="Microsoft Yi Baiti"/>
+        <a:font script="Tibt" typeface="Microsoft Himalaya"/>
+        <a:font script="Thaa" typeface="MV Boli"/>
+        <a:font script="Deva" typeface="Mangal"/>
+        <a:font script="Telu" typeface="Gautami"/>
+        <a:font script="Taml" typeface="Latha"/>
+        <a:font script="Syrc" typeface="Estrangelo Edessa"/>
+        <a:font script="Orya" typeface="Kalinga"/>
+        <a:font script="Mlym" typeface="Kartika"/>
+        <a:font script="Laoo" typeface="DokChampa"/>
+        <a:font script="Sinh" typeface="Iskoola Pota"/>
+        <a:font script="Mong" typeface="Mongolian Baiti"/>
+        <a:font script="Viet" typeface="Arial"/>
+        <a:font script="Uigh" typeface="Microsoft Uighur"/>
+        <a:font script="Geor" typeface="Sylfaen"/>
+        <a:font script="Armn" typeface="Arial"/>
+        <a:font script="Bugi" typeface="Leelawadee UI"/>
+        <a:font script="Bopo" typeface="Microsoft JhengHei"/>
+        <a:font script="Java" typeface="Javanese Text"/>
+        <a:font script="Lisu" typeface="Segoe UI"/>
+        <a:font script="Mymr" typeface="Myanmar Text"/>
+        <a:font script="Nkoo" typeface="Ebrima"/>
+        <a:font script="Olck" typeface="Nirmala UI"/>
+        <a:font script="Osma" typeface="Ebrima"/>
+        <a:font script="Phag" typeface="Phagspa"/>
+        <a:font script="Syrn" typeface="Estrangelo Edessa"/>
+        <a:font script="Syrj" typeface="Estrangelo Edessa"/>
+        <a:font script="Syre" typeface="Estrangelo Edessa"/>
+        <a:font script="Sora" typeface="Nirmala UI"/>
+        <a:font script="Tale" typeface="Microsoft Tai Le"/>
+        <a:font script="Talu" typeface="Microsoft New Tai Lue"/>
+        <a:font script="Tfng" typeface="Ebrima"/>
+      </a:minorFont>
+    </a:fontScheme>
+    <a:fmtScheme name="Office">
+      <a:fillStyleLst>
+        <a:solidFill>
+          <a:schemeClr val="phClr"/>
+        </a:solidFill>
+        <a:gradFill rotWithShape="1">
+          <a:gsLst>
+            <a:gs pos="0">
+              <a:schemeClr val="phClr">
+                <a:lumMod val="110000"/>
+                <a:satMod val="105000"/>
+                <a:tint val="67000"/>
+              </a:schemeClr>
+            </a:gs>
+            <a:gs pos="50000">
+              <a:schemeClr val="phClr">
+                <a:lumMod val="105000"/>
+                <a:satMod val="103000"/>
+                <a:tint val="73000"/>
+              </a:schemeClr>
+            </a:gs>
+            <a:gs pos="100000">
+              <a:schemeClr val="phClr">
+                <a:lumMod val="105000"/>
+                <a:satMod val="109000"/>
+                <a:tint val="81000"/>
+              </a:schemeClr>
+            </a:gs>
+          </a:gsLst>
+          <a:lin ang="5400000" scaled="0"/>
+        </a:gradFill>
+        <a:gradFill rotWithShape="1">
+          <a:gsLst>
+            <a:gs pos="0">
+              <a:schemeClr val="phClr">
+                <a:satMod val="103000"/>
+                <a:lumMod val="102000"/>
+                <a:tint val="94000"/>
+              </a:schemeClr>
+            </a:gs>
+            <a:gs pos="50000">
+              <a:schemeClr val="phClr">
+                <a:satMod val="110000"/>
+                <a:lumMod val="100000"/>
+                <a:shade val="100000"/>
+              </a:schemeClr>
+            </a:gs>
+            <a:gs pos="100000">
+              <a:schemeClr val="phClr">
+                <a:lumMod val="99000"/>
+                <a:satMod val="120000"/>
+                <a:shade val="78000"/>
+              </a:schemeClr>
+            </a:gs>
+          </a:gsLst>
+          <a:lin ang="5400000" scaled="0"/>
+        </a:gradFill>
+      </a:fillStyleLst>
+      <a:lnStyleLst>
+        <a:ln w="12700" cap="flat" cmpd="sng" algn="ctr">
+          <a:solidFill>
+            <a:schemeClr val="phClr"/>
+          </a:solidFill>
+          <a:prstDash val="solid"/>
+          <a:miter lim="800000"/>
+        </a:ln>
+        <a:ln w="19050" cap="flat" cmpd="sng" algn="ctr">
+          <a:solidFill>
+            <a:schemeClr val="phClr"/>
+          </a:solidFill>
+          <a:prstDash val="solid"/>
+          <a:miter lim="800000"/>
+        </a:ln>
+        <a:ln w="25400" cap="flat" cmpd="sng" algn="ctr">
+          <a:solidFill>
+            <a:schemeClr val="phClr"/>
+          </a:solidFill>
+          <a:prstDash val="solid"/>
+          <a:miter lim="800000"/>
+        </a:ln>
+      </a:lnStyleLst>
+      <a:effectStyleLst>
+        <a:effectStyle>
+          <a:effectLst/>
+        </a:effectStyle>
+        <a:effectStyle>
+          <a:effectLst/>
+        </a:effectStyle>
+        <a:effectStyle>
+          <a:effectLst>
+            <a:outerShdw blurRad="57150" dist="19050" dir="5400000" algn="ctr" rotWithShape="0">
+              <a:srgbClr val="000000">
+                <a:alpha val="63000"/>
+              </a:srgbClr>
+            </a:outerShdw>
+          </a:effectLst>
+        </a:effectStyle>
+      </a:effectStyleLst>
+      <a:bgFillStyleLst>
+        <a:solidFill>
+          <a:schemeClr val="phClr"/>
+        </a:solidFill>
+        <a:solidFill>
+          <a:schemeClr val="phClr">
+            <a:tint val="95000"/>
+            <a:satMod val="170000"/>
+          </a:schemeClr>
+        </a:solidFill>
+        <a:gradFill rotWithShape="1">
+          <a:gsLst>
+            <a:gs pos="0">
+              <a:schemeClr val="phClr">
+                <a:tint val="93000"/>
+                <a:satMod val="150000"/>
+                <a:shade val="98000"/>
+                <a:lumMod val="102000"/>
+              </a:schemeClr>
+            </a:gs>
+            <a:gs pos="50000">
+              <a:schemeClr val="phClr">
+                <a:tint val="98000"/>
+                <a:satMod val="130000"/>
+                <a:shade val="90000"/>
+                <a:lumMod val="103000"/>
+              </a:schemeClr>
+            </a:gs>
+            <a:gs pos="100000">
+              <a:schemeClr val="phClr">
+                <a:shade val="63000"/>
+                <a:satMod val="120000"/>
+              </a:schemeClr>
+            </a:gs>
+          </a:gsLst>
+          <a:lin ang="5400000" scaled="0"/>
+        </a:gradFill>
+      </a:bgFillStyleLst>
+    </a:fmtScheme>
+  </a:themeElements>
+  <a:objectDefaults>
+    <a:lnDef>
+      <a:spPr/>
+      <a:bodyPr/>
+      <a:lstStyle/>
+      <a:style>
+        <a:lnRef idx="2">
+          <a:schemeClr val="accent1"/>
+        </a:lnRef>
+        <a:fillRef idx="0">
+          <a:schemeClr val="accent1"/>
+        </a:fillRef>
+        <a:effectRef idx="1">
+          <a:schemeClr val="accent1"/>
+        </a:effectRef>
+        <a:fontRef idx="minor">
+          <a:schemeClr val="tx1"/>
+        </a:fontRef>
+      </a:style>
+    </a:lnDef>
+  </a:objectDefaults>
+  <a:extraClrSchemeLst/>
+  <a:extLst>
+    <a:ext uri="{05A4C25C-085E-4340-85A3-A5531E510DB2}">
+      <thm15:themeFamily xmlns:thm15="http://schemas.microsoft.com/office/thememl/2012/main" name="Office Theme" id="{2E142A2C-CD16-42D6-873A-C26D2A0506FA}" vid="{1BDDFF52-6CD6-40A5-AB3C-68EB2F1E4D0A}"/>
+    </a:ext>
+  </a:extLst>
+</a:theme>
 </file>